--- a/poster.pptx
+++ b/poster.pptx
@@ -2994,6 +2994,53 @@
       </p:grpSpPr>
       <p:pic>
         <p:nvPicPr>
+          <p:cNvPr id="1030" name="Picture 6">
+            <a:extLst>
+              <a:ext uri="{FF2B5EF4-FFF2-40B4-BE49-F238E27FC236}">
+                <a16:creationId xmlns:a16="http://schemas.microsoft.com/office/drawing/2014/main" id="{526F8B55-AE78-0DCB-4A57-393747C15331}"/>
+              </a:ext>
+            </a:extLst>
+          </p:cNvPr>
+          <p:cNvPicPr>
+            <a:picLocks noChangeAspect="1" noChangeArrowheads="1"/>
+          </p:cNvPicPr>
+          <p:nvPr/>
+        </p:nvPicPr>
+        <p:blipFill>
+          <a:blip r:embed="rId2">
+            <a:extLst>
+              <a:ext uri="{28A0092B-C50C-407E-A947-70E740481C1C}">
+                <a14:useLocalDpi xmlns:a14="http://schemas.microsoft.com/office/drawing/2010/main" val="0"/>
+              </a:ext>
+            </a:extLst>
+          </a:blip>
+          <a:srcRect/>
+          <a:stretch>
+            <a:fillRect/>
+          </a:stretch>
+        </p:blipFill>
+        <p:spPr bwMode="auto">
+          <a:xfrm>
+            <a:off x="10985842" y="14303048"/>
+            <a:ext cx="2160000" cy="2160000"/>
+          </a:xfrm>
+          <a:prstGeom prst="rect">
+            <a:avLst/>
+          </a:prstGeom>
+          <a:noFill/>
+          <a:extLst>
+            <a:ext uri="{909E8E84-426E-40DD-AFC4-6F175D3DCCD1}">
+              <a14:hiddenFill xmlns:a14="http://schemas.microsoft.com/office/drawing/2010/main">
+                <a:solidFill>
+                  <a:srgbClr val="FFFFFF"/>
+                </a:solidFill>
+              </a14:hiddenFill>
+            </a:ext>
+          </a:extLst>
+        </p:spPr>
+      </p:pic>
+      <p:pic>
+        <p:nvPicPr>
           <p:cNvPr id="1032" name="Picture 8">
             <a:extLst>
               <a:ext uri="{FF2B5EF4-FFF2-40B4-BE49-F238E27FC236}">
@@ -3007,7 +3054,7 @@
           <p:nvPr/>
         </p:nvPicPr>
         <p:blipFill>
-          <a:blip r:embed="rId2">
+          <a:blip r:embed="rId3">
             <a:extLst>
               <a:ext uri="{28A0092B-C50C-407E-A947-70E740481C1C}">
                 <a14:useLocalDpi xmlns:a14="http://schemas.microsoft.com/office/drawing/2010/main" val="0"/>
@@ -3054,7 +3101,7 @@
           <p:nvPr/>
         </p:nvPicPr>
         <p:blipFill>
-          <a:blip r:embed="rId3">
+          <a:blip r:embed="rId4">
             <a:extLst>
               <a:ext uri="{28A0092B-C50C-407E-A947-70E740481C1C}">
                 <a14:useLocalDpi xmlns:a14="http://schemas.microsoft.com/office/drawing/2010/main" val="0"/>
@@ -3101,7 +3148,7 @@
           <p:nvPr/>
         </p:nvPicPr>
         <p:blipFill>
-          <a:blip r:embed="rId4">
+          <a:blip r:embed="rId5">
             <a:extLst>
               <a:ext uri="{28A0092B-C50C-407E-A947-70E740481C1C}">
                 <a14:useLocalDpi xmlns:a14="http://schemas.microsoft.com/office/drawing/2010/main" val="0"/>
@@ -3285,15 +3332,12 @@
             <a:pPr algn="ctr"/>
             <a:r>
               <a:rPr lang="en-GB" sz="3200" dirty="0">
-                <a:hlinkClick r:id="rId5"/>
+                <a:solidFill>
+                  <a:srgbClr val="000066"/>
+                </a:solidFill>
               </a:rPr>
               <a:t>https://en.wikipedia.org/wiki/Genetic_algorithm</a:t>
             </a:r>
-            <a:endParaRPr lang="en-GB" sz="3200" dirty="0">
-              <a:solidFill>
-                <a:schemeClr val="tx1"/>
-              </a:solidFill>
-            </a:endParaRPr>
           </a:p>
           <a:p>
             <a:pPr algn="ctr"/>
@@ -3326,15 +3370,12 @@
             <a:pPr algn="ctr"/>
             <a:r>
               <a:rPr lang="en-GB" sz="3200" dirty="0">
-                <a:hlinkClick r:id="rId6"/>
+                <a:solidFill>
+                  <a:srgbClr val="000066"/>
+                </a:solidFill>
               </a:rPr>
               <a:t>https://en.wikipedia.org/wiki/Computational_fluid_dynamics</a:t>
             </a:r>
-            <a:endParaRPr lang="en-GB" sz="3200" dirty="0">
-              <a:solidFill>
-                <a:schemeClr val="tx1"/>
-              </a:solidFill>
-            </a:endParaRPr>
           </a:p>
         </p:txBody>
       </p:sp>
@@ -3972,7 +4013,15 @@
           </a:p>
           <a:p>
             <a:pPr algn="ctr"/>
-            <a:endParaRPr lang="en-GB" sz="3200" dirty="0">
+            <a:endParaRPr lang="en-GB" sz="1100" dirty="0">
+              <a:solidFill>
+                <a:schemeClr val="tx1"/>
+              </a:solidFill>
+            </a:endParaRPr>
+          </a:p>
+          <a:p>
+            <a:pPr algn="ctr"/>
+            <a:endParaRPr lang="en-GB" sz="1100" dirty="0">
               <a:solidFill>
                 <a:schemeClr val="tx1"/>
               </a:solidFill>
@@ -4246,7 +4295,7 @@
           <p:nvPr/>
         </p:nvPicPr>
         <p:blipFill>
-          <a:blip r:embed="rId7">
+          <a:blip r:embed="rId6">
             <a:extLst>
               <a:ext uri="{28A0092B-C50C-407E-A947-70E740481C1C}">
                 <a14:useLocalDpi xmlns:a14="http://schemas.microsoft.com/office/drawing/2010/main" val="0"/>
@@ -4260,55 +4309,8 @@
         </p:blipFill>
         <p:spPr bwMode="auto">
           <a:xfrm>
-            <a:off x="845436" y="9419970"/>
+            <a:off x="845625" y="9419970"/>
             <a:ext cx="9000000" cy="3000000"/>
-          </a:xfrm>
-          <a:prstGeom prst="rect">
-            <a:avLst/>
-          </a:prstGeom>
-          <a:noFill/>
-          <a:extLst>
-            <a:ext uri="{909E8E84-426E-40DD-AFC4-6F175D3DCCD1}">
-              <a14:hiddenFill xmlns:a14="http://schemas.microsoft.com/office/drawing/2010/main">
-                <a:solidFill>
-                  <a:srgbClr val="FFFFFF"/>
-                </a:solidFill>
-              </a14:hiddenFill>
-            </a:ext>
-          </a:extLst>
-        </p:spPr>
-      </p:pic>
-      <p:pic>
-        <p:nvPicPr>
-          <p:cNvPr id="1030" name="Picture 6">
-            <a:extLst>
-              <a:ext uri="{FF2B5EF4-FFF2-40B4-BE49-F238E27FC236}">
-                <a16:creationId xmlns:a16="http://schemas.microsoft.com/office/drawing/2014/main" id="{526F8B55-AE78-0DCB-4A57-393747C15331}"/>
-              </a:ext>
-            </a:extLst>
-          </p:cNvPr>
-          <p:cNvPicPr>
-            <a:picLocks noChangeAspect="1" noChangeArrowheads="1"/>
-          </p:cNvPicPr>
-          <p:nvPr/>
-        </p:nvPicPr>
-        <p:blipFill>
-          <a:blip r:embed="rId8">
-            <a:extLst>
-              <a:ext uri="{28A0092B-C50C-407E-A947-70E740481C1C}">
-                <a14:useLocalDpi xmlns:a14="http://schemas.microsoft.com/office/drawing/2010/main" val="0"/>
-              </a:ext>
-            </a:extLst>
-          </a:blip>
-          <a:srcRect/>
-          <a:stretch>
-            <a:fillRect/>
-          </a:stretch>
-        </p:blipFill>
-        <p:spPr bwMode="auto">
-          <a:xfrm>
-            <a:off x="10985842" y="14303048"/>
-            <a:ext cx="2160000" cy="2160000"/>
           </a:xfrm>
           <a:prstGeom prst="rect">
             <a:avLst/>
@@ -4771,7 +4773,7 @@
           <p:nvPr>
             <p:extLst>
               <p:ext uri="{D42A27DB-BD31-4B8C-83A1-F6EECF244321}">
-                <p14:modId xmlns:p14="http://schemas.microsoft.com/office/powerpoint/2010/main" val="2964681958"/>
+                <p14:modId xmlns:p14="http://schemas.microsoft.com/office/powerpoint/2010/main" val="4282257347"/>
               </p:ext>
             </p:extLst>
           </p:nvPr>
@@ -5122,11 +5124,14 @@
                     <a:bodyPr/>
                     <a:lstStyle/>
                     <a:p>
-                      <a:endParaRPr lang="en-GB" sz="3200" dirty="0">
-                        <a:solidFill>
-                          <a:schemeClr val="bg1"/>
-                        </a:solidFill>
-                      </a:endParaRPr>
+                      <a:r>
+                        <a:rPr lang="en-GB" sz="3200" dirty="0">
+                          <a:solidFill>
+                            <a:schemeClr val="bg1"/>
+                          </a:solidFill>
+                        </a:rPr>
+                        <a:t>494</a:t>
+                      </a:r>
                     </a:p>
                   </a:txBody>
                   <a:tcPr>
@@ -5627,7 +5632,7 @@
           <p:nvPr/>
         </p:nvPicPr>
         <p:blipFill>
-          <a:blip r:embed="rId9">
+          <a:blip r:embed="rId7">
             <a:extLst>
               <a:ext uri="{28A0092B-C50C-407E-A947-70E740481C1C}">
                 <a14:useLocalDpi xmlns:a14="http://schemas.microsoft.com/office/drawing/2010/main" val="0"/>
@@ -5657,6 +5662,36 @@
               </a14:hiddenFill>
             </a:ext>
           </a:extLst>
+        </p:spPr>
+      </p:pic>
+      <p:pic>
+        <p:nvPicPr>
+          <p:cNvPr id="2" name="Picture 1" descr="points.png">
+            <a:extLst>
+              <a:ext uri="{FF2B5EF4-FFF2-40B4-BE49-F238E27FC236}">
+                <a16:creationId xmlns:a16="http://schemas.microsoft.com/office/drawing/2014/main" id="{1FDC10CA-218A-215F-9694-D3920F58F1CD}"/>
+              </a:ext>
+            </a:extLst>
+          </p:cNvPr>
+          <p:cNvPicPr>
+            <a:picLocks noChangeAspect="1"/>
+          </p:cNvPicPr>
+          <p:nvPr/>
+        </p:nvPicPr>
+        <p:blipFill>
+          <a:blip r:embed="rId8"/>
+          <a:stretch>
+            <a:fillRect/>
+          </a:stretch>
+        </p:blipFill>
+        <p:spPr>
+          <a:xfrm>
+            <a:off x="11536311" y="9419970"/>
+            <a:ext cx="9000000" cy="3000000"/>
+          </a:xfrm>
+          <a:prstGeom prst="rect">
+            <a:avLst/>
+          </a:prstGeom>
         </p:spPr>
       </p:pic>
     </p:spTree>

--- a/poster.pptx
+++ b/poster.pptx
@@ -3253,14 +3253,14 @@
         </p:nvSpPr>
         <p:spPr>
           <a:xfrm>
-            <a:off x="-375" y="3362400"/>
-            <a:ext cx="21384000" cy="5047200"/>
+            <a:off x="5664655" y="3362400"/>
+            <a:ext cx="10054314" cy="5047200"/>
           </a:xfrm>
           <a:prstGeom prst="rect">
             <a:avLst/>
           </a:prstGeom>
           <a:noFill/>
-          <a:ln>
+          <a:ln w="76200">
             <a:solidFill>
               <a:schemeClr val="tx1"/>
             </a:solidFill>
@@ -3295,14 +3295,6 @@
               </a:rPr>
               <a:t>Definitions</a:t>
             </a:r>
-            <a:endParaRPr lang="en-GB" sz="1600" b="1" u="sng" dirty="0">
-              <a:solidFill>
-                <a:schemeClr val="tx1"/>
-              </a:solidFill>
-            </a:endParaRPr>
-          </a:p>
-          <a:p>
-            <a:pPr algn="ctr"/>
             <a:endParaRPr lang="en-GB" sz="1600" b="1" dirty="0">
               <a:solidFill>
                 <a:schemeClr val="tx1"/>
@@ -3325,27 +3317,8 @@
                   <a:schemeClr val="tx1"/>
                 </a:solidFill>
               </a:rPr>
-              <a:t>A type of algorithm that approximates a solution to a complex problem. They follow a method that is similar to evolution, where the better the potential solution, the more likely it is to influence the next generation.</a:t>
-            </a:r>
-          </a:p>
-          <a:p>
-            <a:pPr algn="ctr"/>
-            <a:r>
-              <a:rPr lang="en-GB" sz="3200" dirty="0">
-                <a:solidFill>
-                  <a:srgbClr val="000066"/>
-                </a:solidFill>
-              </a:rPr>
-              <a:t>https://en.wikipedia.org/wiki/Genetic_algorithm</a:t>
-            </a:r>
-          </a:p>
-          <a:p>
-            <a:pPr algn="ctr"/>
-            <a:endParaRPr lang="en-GB" sz="3200" dirty="0">
-              <a:solidFill>
-                <a:schemeClr val="tx1"/>
-              </a:solidFill>
-            </a:endParaRPr>
+              <a:t>A type of algorithm that approximates a solution to a complex problem. They act like evolution, where the better the potential solution, the more likely it is to influence the next generation. </a:t>
+            </a:r>
           </a:p>
           <a:p>
             <a:pPr algn="ctr"/>
@@ -3363,19 +3336,13 @@
                   <a:schemeClr val="tx1"/>
                 </a:solidFill>
               </a:rPr>
-              <a:t>Computation Fluid Dynamics – Using complex computer programs to simulate the flow of fluids – usually air – around and through a system. Used to estimate flow patterns to minimise time needed in an air tunnel.</a:t>
-            </a:r>
-          </a:p>
-          <a:p>
-            <a:pPr algn="ctr"/>
-            <a:r>
-              <a:rPr lang="en-GB" sz="3200" dirty="0">
-                <a:solidFill>
-                  <a:srgbClr val="000066"/>
-                </a:solidFill>
-              </a:rPr>
-              <a:t>https://en.wikipedia.org/wiki/Computational_fluid_dynamics</a:t>
-            </a:r>
+              <a:t>Computation Fluid Dynamics – Using complex computer programs to simulate the flow of fluids around and through a system. </a:t>
+            </a:r>
+            <a:endParaRPr lang="en-GB" sz="3200" dirty="0">
+              <a:solidFill>
+                <a:srgbClr val="000066"/>
+              </a:solidFill>
+            </a:endParaRPr>
           </a:p>
         </p:txBody>
       </p:sp>
@@ -3400,7 +3367,7 @@
             <a:avLst/>
           </a:prstGeom>
           <a:noFill/>
-          <a:ln>
+          <a:ln w="76200">
             <a:solidFill>
               <a:schemeClr val="tx1"/>
             </a:solidFill>
@@ -3442,15 +3409,15 @@
               <a:buChar char="•"/>
             </a:pPr>
             <a:r>
-              <a:rPr lang="en-GB" sz="3600" dirty="0">
+              <a:rPr lang="en-GB" sz="3200" dirty="0">
                 <a:solidFill>
                   <a:schemeClr val="tx1"/>
                 </a:solidFill>
               </a:rPr>
-              <a:t>They are useful to discover if there are any bugs in a solver as they </a:t>
-            </a:r>
-            <a:r>
-              <a:rPr lang="en-GB" sz="3600" i="1" dirty="0">
+              <a:t>Genetic algorithms are useful to discover if there are any bugs in a solver as they </a:t>
+            </a:r>
+            <a:r>
+              <a:rPr lang="en-GB" sz="3200" i="1" dirty="0">
                 <a:solidFill>
                   <a:schemeClr val="tx1"/>
                 </a:solidFill>
@@ -3458,7 +3425,7 @@
               <a:t>will</a:t>
             </a:r>
             <a:r>
-              <a:rPr lang="en-GB" sz="3600" dirty="0">
+              <a:rPr lang="en-GB" sz="3200" dirty="0">
                 <a:solidFill>
                   <a:schemeClr val="tx1"/>
                 </a:solidFill>
@@ -3472,7 +3439,7 @@
               <a:buChar char="•"/>
             </a:pPr>
             <a:r>
-              <a:rPr lang="en-GB" sz="3600" dirty="0">
+              <a:rPr lang="en-GB" sz="3200" dirty="0">
                 <a:solidFill>
                   <a:schemeClr val="tx1"/>
                 </a:solidFill>
@@ -3480,7 +3447,7 @@
               <a:t>If the system is properly constrained, like </a:t>
             </a:r>
             <a:r>
-              <a:rPr lang="en-GB" sz="3600" b="1" dirty="0">
+              <a:rPr lang="en-GB" sz="3200" b="1" dirty="0">
                 <a:solidFill>
                   <a:schemeClr val="tx1"/>
                 </a:solidFill>
@@ -3488,12 +3455,12 @@
               <a:t>Study 3</a:t>
             </a:r>
             <a:r>
-              <a:rPr lang="en-GB" sz="3600" dirty="0">
+              <a:rPr lang="en-GB" sz="3200" dirty="0">
                 <a:solidFill>
                   <a:schemeClr val="tx1"/>
                 </a:solidFill>
               </a:rPr>
-              <a:t>, then they can produce a near-perfect result.</a:t>
+              <a:t>, then genetic algorithms can produce a near-perfect result.</a:t>
             </a:r>
           </a:p>
           <a:p>
@@ -3502,13 +3469,24 @@
               <a:buChar char="•"/>
             </a:pPr>
             <a:r>
-              <a:rPr lang="en-GB" sz="3600" dirty="0">
+              <a:rPr lang="en-GB" sz="3200" dirty="0">
                 <a:solidFill>
                   <a:schemeClr val="tx1"/>
                 </a:solidFill>
               </a:rPr>
-              <a:t>If left to run for long enough then it will stop producing accurate results as the solver won’t give a higher result.</a:t>
-            </a:r>
+              <a:t>If left to run for long enough then genetic algorithms will stop producing accurate results as the solver won’t give a higher result.</a:t>
+            </a:r>
+          </a:p>
+          <a:p>
+            <a:pPr marL="685800" indent="-685800" algn="ctr">
+              <a:buFont typeface="Arial" panose="020B0604020202020204" pitchFamily="34" charset="0"/>
+              <a:buChar char="•"/>
+            </a:pPr>
+            <a:endParaRPr lang="en-GB" sz="3200" dirty="0">
+              <a:solidFill>
+                <a:schemeClr val="tx1"/>
+              </a:solidFill>
+            </a:endParaRPr>
           </a:p>
           <a:p>
             <a:pPr algn="r"/>
@@ -3544,7 +3522,7 @@
             <a:avLst/>
           </a:prstGeom>
           <a:noFill/>
-          <a:ln>
+          <a:ln w="76200">
             <a:solidFill>
               <a:schemeClr val="tx1"/>
             </a:solidFill>
@@ -3730,7 +3708,7 @@
             <a:avLst/>
           </a:prstGeom>
           <a:noFill/>
-          <a:ln>
+          <a:ln w="76200">
             <a:solidFill>
               <a:schemeClr val="tx1"/>
             </a:solidFill>
@@ -3924,7 +3902,7 @@
             <a:avLst/>
           </a:prstGeom>
           <a:noFill/>
-          <a:ln>
+          <a:ln w="76200">
             <a:solidFill>
               <a:schemeClr val="tx1"/>
             </a:solidFill>
@@ -4099,7 +4077,7 @@
             <a:avLst/>
           </a:prstGeom>
           <a:noFill/>
-          <a:ln>
+          <a:ln w="76200">
             <a:solidFill>
               <a:schemeClr val="tx1"/>
             </a:solidFill>
@@ -4342,7 +4320,7 @@
           <p:nvPr>
             <p:extLst>
               <p:ext uri="{D42A27DB-BD31-4B8C-83A1-F6EECF244321}">
-                <p14:modId xmlns:p14="http://schemas.microsoft.com/office/powerpoint/2010/main" val="706241607"/>
+                <p14:modId xmlns:p14="http://schemas.microsoft.com/office/powerpoint/2010/main" val="1948099350"/>
               </p:ext>
             </p:extLst>
           </p:nvPr>
@@ -4355,7 +4333,7 @@
           <a:graphicData uri="http://schemas.openxmlformats.org/drawingml/2006/table">
             <a:tbl>
               <a:tblPr bandRow="1">
-                <a:tableStyleId>{D113A9D2-9D6B-4929-AA2D-F23B5EE8CBE7}</a:tableStyleId>
+                <a:tableStyleId>{5C22544A-7EE6-4342-B048-85BDC9FD1C3A}</a:tableStyleId>
               </a:tblPr>
               <a:tblGrid>
                 <a:gridCol w="3206300">
@@ -4382,7 +4360,7 @@
                       <a:r>
                         <a:rPr lang="en-GB" sz="3200" dirty="0">
                           <a:solidFill>
-                            <a:schemeClr val="bg1"/>
+                            <a:schemeClr val="tx1"/>
                           </a:solidFill>
                         </a:rPr>
                         <a:t>Starting</a:t>
@@ -4392,7 +4370,7 @@
                   <a:tcPr>
                     <a:lnL w="12700" cap="flat" cmpd="sng" algn="ctr">
                       <a:solidFill>
-                        <a:schemeClr val="bg1"/>
+                        <a:schemeClr val="tx1"/>
                       </a:solidFill>
                       <a:prstDash val="solid"/>
                       <a:round/>
@@ -4401,7 +4379,7 @@
                     </a:lnL>
                     <a:lnR w="12700" cap="flat" cmpd="sng" algn="ctr">
                       <a:solidFill>
-                        <a:schemeClr val="bg1"/>
+                        <a:schemeClr val="tx1"/>
                       </a:solidFill>
                       <a:prstDash val="solid"/>
                       <a:round/>
@@ -4410,7 +4388,7 @@
                     </a:lnR>
                     <a:lnT w="12700" cap="flat" cmpd="sng" algn="ctr">
                       <a:solidFill>
-                        <a:schemeClr val="bg1"/>
+                        <a:schemeClr val="tx1"/>
                       </a:solidFill>
                       <a:prstDash val="solid"/>
                       <a:round/>
@@ -4419,19 +4397,13 @@
                     </a:lnT>
                     <a:lnB w="12700" cap="flat" cmpd="sng" algn="ctr">
                       <a:solidFill>
-                        <a:schemeClr val="bg1"/>
+                        <a:schemeClr val="tx1"/>
                       </a:solidFill>
                       <a:prstDash val="solid"/>
                       <a:round/>
                       <a:headEnd type="none" w="med" len="med"/>
                       <a:tailEnd type="none" w="med" len="med"/>
                     </a:lnB>
-                    <a:solidFill>
-                      <a:schemeClr val="tx1">
-                        <a:lumMod val="85000"/>
-                        <a:lumOff val="15000"/>
-                      </a:schemeClr>
-                    </a:solidFill>
                   </a:tcPr>
                 </a:tc>
                 <a:tc>
@@ -4442,7 +4414,7 @@
                       <a:r>
                         <a:rPr lang="en-GB" sz="3200" dirty="0">
                           <a:solidFill>
-                            <a:schemeClr val="bg1"/>
+                            <a:schemeClr val="tx1"/>
                           </a:solidFill>
                         </a:rPr>
                         <a:t>Random points</a:t>
@@ -4452,7 +4424,7 @@
                   <a:tcPr>
                     <a:lnL w="12700" cap="flat" cmpd="sng" algn="ctr">
                       <a:solidFill>
-                        <a:schemeClr val="bg1"/>
+                        <a:schemeClr val="tx1"/>
                       </a:solidFill>
                       <a:prstDash val="solid"/>
                       <a:round/>
@@ -4461,7 +4433,7 @@
                     </a:lnL>
                     <a:lnR w="12700" cap="flat" cmpd="sng" algn="ctr">
                       <a:solidFill>
-                        <a:schemeClr val="bg1"/>
+                        <a:schemeClr val="tx1"/>
                       </a:solidFill>
                       <a:prstDash val="solid"/>
                       <a:round/>
@@ -4470,7 +4442,7 @@
                     </a:lnR>
                     <a:lnT w="12700" cap="flat" cmpd="sng" algn="ctr">
                       <a:solidFill>
-                        <a:schemeClr val="bg1"/>
+                        <a:schemeClr val="tx1"/>
                       </a:solidFill>
                       <a:prstDash val="solid"/>
                       <a:round/>
@@ -4479,19 +4451,13 @@
                     </a:lnT>
                     <a:lnB w="12700" cap="flat" cmpd="sng" algn="ctr">
                       <a:solidFill>
-                        <a:schemeClr val="bg1"/>
+                        <a:schemeClr val="tx1"/>
                       </a:solidFill>
                       <a:prstDash val="solid"/>
                       <a:round/>
                       <a:headEnd type="none" w="med" len="med"/>
                       <a:tailEnd type="none" w="med" len="med"/>
                     </a:lnB>
-                    <a:solidFill>
-                      <a:schemeClr val="tx1">
-                        <a:lumMod val="85000"/>
-                        <a:lumOff val="15000"/>
-                      </a:schemeClr>
-                    </a:solidFill>
                   </a:tcPr>
                 </a:tc>
                 <a:extLst>
@@ -4509,7 +4475,7 @@
                       <a:r>
                         <a:rPr lang="en-GB" sz="3200" dirty="0">
                           <a:solidFill>
-                            <a:schemeClr val="bg1"/>
+                            <a:schemeClr val="tx1"/>
                           </a:solidFill>
                         </a:rPr>
                         <a:t>Combining</a:t>
@@ -4519,7 +4485,7 @@
                   <a:tcPr>
                     <a:lnL w="12700" cap="flat" cmpd="sng" algn="ctr">
                       <a:solidFill>
-                        <a:schemeClr val="bg1"/>
+                        <a:schemeClr val="tx1"/>
                       </a:solidFill>
                       <a:prstDash val="solid"/>
                       <a:round/>
@@ -4528,7 +4494,7 @@
                     </a:lnL>
                     <a:lnR w="12700" cap="flat" cmpd="sng" algn="ctr">
                       <a:solidFill>
-                        <a:schemeClr val="bg1"/>
+                        <a:schemeClr val="tx1"/>
                       </a:solidFill>
                       <a:prstDash val="solid"/>
                       <a:round/>
@@ -4537,7 +4503,7 @@
                     </a:lnR>
                     <a:lnT w="12700" cap="flat" cmpd="sng" algn="ctr">
                       <a:solidFill>
-                        <a:schemeClr val="bg1"/>
+                        <a:schemeClr val="tx1"/>
                       </a:solidFill>
                       <a:prstDash val="solid"/>
                       <a:round/>
@@ -4546,19 +4512,13 @@
                     </a:lnT>
                     <a:lnB w="12700" cap="flat" cmpd="sng" algn="ctr">
                       <a:solidFill>
-                        <a:schemeClr val="bg1"/>
+                        <a:schemeClr val="tx1"/>
                       </a:solidFill>
                       <a:prstDash val="solid"/>
                       <a:round/>
                       <a:headEnd type="none" w="med" len="med"/>
                       <a:tailEnd type="none" w="med" len="med"/>
                     </a:lnB>
-                    <a:solidFill>
-                      <a:schemeClr val="tx1">
-                        <a:lumMod val="85000"/>
-                        <a:lumOff val="15000"/>
-                      </a:schemeClr>
-                    </a:solidFill>
                   </a:tcPr>
                 </a:tc>
                 <a:tc>
@@ -4569,7 +4529,7 @@
                       <a:r>
                         <a:rPr lang="en-GB" sz="3200" dirty="0">
                           <a:solidFill>
-                            <a:schemeClr val="bg1"/>
+                            <a:schemeClr val="tx1"/>
                           </a:solidFill>
                         </a:rPr>
                         <a:t>Averaging points</a:t>
@@ -4579,7 +4539,7 @@
                   <a:tcPr>
                     <a:lnL w="12700" cap="flat" cmpd="sng" algn="ctr">
                       <a:solidFill>
-                        <a:schemeClr val="bg1"/>
+                        <a:schemeClr val="tx1"/>
                       </a:solidFill>
                       <a:prstDash val="solid"/>
                       <a:round/>
@@ -4588,7 +4548,7 @@
                     </a:lnL>
                     <a:lnR w="12700" cap="flat" cmpd="sng" algn="ctr">
                       <a:solidFill>
-                        <a:schemeClr val="bg1"/>
+                        <a:schemeClr val="tx1"/>
                       </a:solidFill>
                       <a:prstDash val="solid"/>
                       <a:round/>
@@ -4597,7 +4557,7 @@
                     </a:lnR>
                     <a:lnT w="12700" cap="flat" cmpd="sng" algn="ctr">
                       <a:solidFill>
-                        <a:schemeClr val="bg1"/>
+                        <a:schemeClr val="tx1"/>
                       </a:solidFill>
                       <a:prstDash val="solid"/>
                       <a:round/>
@@ -4606,19 +4566,13 @@
                     </a:lnT>
                     <a:lnB w="12700" cap="flat" cmpd="sng" algn="ctr">
                       <a:solidFill>
-                        <a:schemeClr val="bg1"/>
+                        <a:schemeClr val="tx1"/>
                       </a:solidFill>
                       <a:prstDash val="solid"/>
                       <a:round/>
                       <a:headEnd type="none" w="med" len="med"/>
                       <a:tailEnd type="none" w="med" len="med"/>
                     </a:lnB>
-                    <a:solidFill>
-                      <a:schemeClr val="tx1">
-                        <a:lumMod val="85000"/>
-                        <a:lumOff val="15000"/>
-                      </a:schemeClr>
-                    </a:solidFill>
                   </a:tcPr>
                 </a:tc>
                 <a:extLst>
@@ -4636,7 +4590,7 @@
                       <a:r>
                         <a:rPr lang="en-GB" sz="3200" dirty="0">
                           <a:solidFill>
-                            <a:schemeClr val="bg1"/>
+                            <a:schemeClr val="tx1"/>
                           </a:solidFill>
                         </a:rPr>
                         <a:t>L/D</a:t>
@@ -4646,7 +4600,7 @@
                   <a:tcPr>
                     <a:lnL w="12700" cap="flat" cmpd="sng" algn="ctr">
                       <a:solidFill>
-                        <a:schemeClr val="bg1"/>
+                        <a:schemeClr val="tx1"/>
                       </a:solidFill>
                       <a:prstDash val="solid"/>
                       <a:round/>
@@ -4655,7 +4609,7 @@
                     </a:lnL>
                     <a:lnR w="12700" cap="flat" cmpd="sng" algn="ctr">
                       <a:solidFill>
-                        <a:schemeClr val="bg1"/>
+                        <a:schemeClr val="tx1"/>
                       </a:solidFill>
                       <a:prstDash val="solid"/>
                       <a:round/>
@@ -4664,7 +4618,7 @@
                     </a:lnR>
                     <a:lnT w="12700" cap="flat" cmpd="sng" algn="ctr">
                       <a:solidFill>
-                        <a:schemeClr val="bg1"/>
+                        <a:schemeClr val="tx1"/>
                       </a:solidFill>
                       <a:prstDash val="solid"/>
                       <a:round/>
@@ -4673,19 +4627,13 @@
                     </a:lnT>
                     <a:lnB w="12700" cap="flat" cmpd="sng" algn="ctr">
                       <a:solidFill>
-                        <a:schemeClr val="bg1"/>
+                        <a:schemeClr val="tx1"/>
                       </a:solidFill>
                       <a:prstDash val="solid"/>
                       <a:round/>
                       <a:headEnd type="none" w="med" len="med"/>
                       <a:tailEnd type="none" w="med" len="med"/>
                     </a:lnB>
-                    <a:solidFill>
-                      <a:schemeClr val="tx1">
-                        <a:lumMod val="85000"/>
-                        <a:lumOff val="15000"/>
-                      </a:schemeClr>
-                    </a:solidFill>
                   </a:tcPr>
                 </a:tc>
                 <a:tc>
@@ -4696,7 +4644,7 @@
                       <a:r>
                         <a:rPr lang="en-GB" sz="3200" dirty="0">
                           <a:solidFill>
-                            <a:schemeClr val="bg1"/>
+                            <a:schemeClr val="tx1"/>
                           </a:solidFill>
                         </a:rPr>
                         <a:t>Infinity</a:t>
@@ -4706,7 +4654,7 @@
                   <a:tcPr>
                     <a:lnL w="12700" cap="flat" cmpd="sng" algn="ctr">
                       <a:solidFill>
-                        <a:schemeClr val="bg1"/>
+                        <a:schemeClr val="tx1"/>
                       </a:solidFill>
                       <a:prstDash val="solid"/>
                       <a:round/>
@@ -4715,7 +4663,7 @@
                     </a:lnL>
                     <a:lnR w="12700" cap="flat" cmpd="sng" algn="ctr">
                       <a:solidFill>
-                        <a:schemeClr val="bg1"/>
+                        <a:schemeClr val="tx1"/>
                       </a:solidFill>
                       <a:prstDash val="solid"/>
                       <a:round/>
@@ -4724,7 +4672,7 @@
                     </a:lnR>
                     <a:lnT w="12700" cap="flat" cmpd="sng" algn="ctr">
                       <a:solidFill>
-                        <a:schemeClr val="bg1"/>
+                        <a:schemeClr val="tx1"/>
                       </a:solidFill>
                       <a:prstDash val="solid"/>
                       <a:round/>
@@ -4733,19 +4681,13 @@
                     </a:lnT>
                     <a:lnB w="12700" cap="flat" cmpd="sng" algn="ctr">
                       <a:solidFill>
-                        <a:schemeClr val="bg1"/>
+                        <a:schemeClr val="tx1"/>
                       </a:solidFill>
                       <a:prstDash val="solid"/>
                       <a:round/>
                       <a:headEnd type="none" w="med" len="med"/>
                       <a:tailEnd type="none" w="med" len="med"/>
                     </a:lnB>
-                    <a:solidFill>
-                      <a:schemeClr val="tx1">
-                        <a:lumMod val="85000"/>
-                        <a:lumOff val="15000"/>
-                      </a:schemeClr>
-                    </a:solidFill>
                   </a:tcPr>
                 </a:tc>
                 <a:extLst>
@@ -4773,7 +4715,7 @@
           <p:nvPr>
             <p:extLst>
               <p:ext uri="{D42A27DB-BD31-4B8C-83A1-F6EECF244321}">
-                <p14:modId xmlns:p14="http://schemas.microsoft.com/office/powerpoint/2010/main" val="4282257347"/>
+                <p14:modId xmlns:p14="http://schemas.microsoft.com/office/powerpoint/2010/main" val="3170804710"/>
               </p:ext>
             </p:extLst>
           </p:nvPr>
@@ -4786,7 +4728,7 @@
           <a:graphicData uri="http://schemas.openxmlformats.org/drawingml/2006/table">
             <a:tbl>
               <a:tblPr bandRow="1">
-                <a:tableStyleId>{D113A9D2-9D6B-4929-AA2D-F23B5EE8CBE7}</a:tableStyleId>
+                <a:tableStyleId>{5C22544A-7EE6-4342-B048-85BDC9FD1C3A}</a:tableStyleId>
               </a:tblPr>
               <a:tblGrid>
                 <a:gridCol w="3206300">
@@ -4813,7 +4755,7 @@
                       <a:r>
                         <a:rPr lang="en-GB" sz="3200" dirty="0">
                           <a:solidFill>
-                            <a:schemeClr val="bg1"/>
+                            <a:schemeClr val="tx1"/>
                           </a:solidFill>
                         </a:rPr>
                         <a:t>Starting</a:t>
@@ -4823,7 +4765,7 @@
                   <a:tcPr>
                     <a:lnL w="12700" cap="flat" cmpd="sng" algn="ctr">
                       <a:solidFill>
-                        <a:schemeClr val="bg1"/>
+                        <a:schemeClr val="tx1"/>
                       </a:solidFill>
                       <a:prstDash val="solid"/>
                       <a:round/>
@@ -4832,7 +4774,7 @@
                     </a:lnL>
                     <a:lnR w="12700" cap="flat" cmpd="sng" algn="ctr">
                       <a:solidFill>
-                        <a:schemeClr val="bg1"/>
+                        <a:schemeClr val="tx1"/>
                       </a:solidFill>
                       <a:prstDash val="solid"/>
                       <a:round/>
@@ -4841,7 +4783,7 @@
                     </a:lnR>
                     <a:lnT w="12700" cap="flat" cmpd="sng" algn="ctr">
                       <a:solidFill>
-                        <a:schemeClr val="bg1"/>
+                        <a:schemeClr val="tx1"/>
                       </a:solidFill>
                       <a:prstDash val="solid"/>
                       <a:round/>
@@ -4850,19 +4792,13 @@
                     </a:lnT>
                     <a:lnB w="12700" cap="flat" cmpd="sng" algn="ctr">
                       <a:solidFill>
-                        <a:schemeClr val="bg1"/>
+                        <a:schemeClr val="tx1"/>
                       </a:solidFill>
                       <a:prstDash val="solid"/>
                       <a:round/>
                       <a:headEnd type="none" w="med" len="med"/>
                       <a:tailEnd type="none" w="med" len="med"/>
                     </a:lnB>
-                    <a:solidFill>
-                      <a:schemeClr val="tx1">
-                        <a:lumMod val="85000"/>
-                        <a:lumOff val="15000"/>
-                      </a:schemeClr>
-                    </a:solidFill>
                   </a:tcPr>
                 </a:tc>
                 <a:tc>
@@ -4873,7 +4809,7 @@
                       <a:r>
                         <a:rPr lang="en-GB" sz="3200" dirty="0">
                           <a:solidFill>
-                            <a:schemeClr val="bg1"/>
+                            <a:schemeClr val="tx1"/>
                           </a:solidFill>
                         </a:rPr>
                         <a:t>Airfoils</a:t>
@@ -4883,7 +4819,7 @@
                   <a:tcPr>
                     <a:lnL w="12700" cap="flat" cmpd="sng" algn="ctr">
                       <a:solidFill>
-                        <a:schemeClr val="bg1"/>
+                        <a:schemeClr val="tx1"/>
                       </a:solidFill>
                       <a:prstDash val="solid"/>
                       <a:round/>
@@ -4892,7 +4828,7 @@
                     </a:lnL>
                     <a:lnR w="12700" cap="flat" cmpd="sng" algn="ctr">
                       <a:solidFill>
-                        <a:schemeClr val="bg1"/>
+                        <a:schemeClr val="tx1"/>
                       </a:solidFill>
                       <a:prstDash val="solid"/>
                       <a:round/>
@@ -4901,7 +4837,7 @@
                     </a:lnR>
                     <a:lnT w="12700" cap="flat" cmpd="sng" algn="ctr">
                       <a:solidFill>
-                        <a:schemeClr val="bg1"/>
+                        <a:schemeClr val="tx1"/>
                       </a:solidFill>
                       <a:prstDash val="solid"/>
                       <a:round/>
@@ -4910,19 +4846,13 @@
                     </a:lnT>
                     <a:lnB w="12700" cap="flat" cmpd="sng" algn="ctr">
                       <a:solidFill>
-                        <a:schemeClr val="bg1"/>
+                        <a:schemeClr val="tx1"/>
                       </a:solidFill>
                       <a:prstDash val="solid"/>
                       <a:round/>
                       <a:headEnd type="none" w="med" len="med"/>
                       <a:tailEnd type="none" w="med" len="med"/>
                     </a:lnB>
-                    <a:solidFill>
-                      <a:schemeClr val="tx1">
-                        <a:lumMod val="85000"/>
-                        <a:lumOff val="15000"/>
-                      </a:schemeClr>
-                    </a:solidFill>
                   </a:tcPr>
                 </a:tc>
                 <a:extLst>
@@ -4940,7 +4870,7 @@
                       <a:r>
                         <a:rPr lang="en-GB" sz="3200" dirty="0">
                           <a:solidFill>
-                            <a:schemeClr val="bg1"/>
+                            <a:schemeClr val="tx1"/>
                           </a:solidFill>
                         </a:rPr>
                         <a:t>Combining</a:t>
@@ -4950,7 +4880,7 @@
                   <a:tcPr>
                     <a:lnL w="12700" cap="flat" cmpd="sng" algn="ctr">
                       <a:solidFill>
-                        <a:schemeClr val="bg1"/>
+                        <a:schemeClr val="tx1"/>
                       </a:solidFill>
                       <a:prstDash val="solid"/>
                       <a:round/>
@@ -4959,7 +4889,7 @@
                     </a:lnL>
                     <a:lnR w="12700" cap="flat" cmpd="sng" algn="ctr">
                       <a:solidFill>
-                        <a:schemeClr val="bg1"/>
+                        <a:schemeClr val="tx1"/>
                       </a:solidFill>
                       <a:prstDash val="solid"/>
                       <a:round/>
@@ -4968,7 +4898,7 @@
                     </a:lnR>
                     <a:lnT w="12700" cap="flat" cmpd="sng" algn="ctr">
                       <a:solidFill>
-                        <a:schemeClr val="bg1"/>
+                        <a:schemeClr val="tx1"/>
                       </a:solidFill>
                       <a:prstDash val="solid"/>
                       <a:round/>
@@ -4977,19 +4907,13 @@
                     </a:lnT>
                     <a:lnB w="12700" cap="flat" cmpd="sng" algn="ctr">
                       <a:solidFill>
-                        <a:schemeClr val="bg1"/>
+                        <a:schemeClr val="tx1"/>
                       </a:solidFill>
                       <a:prstDash val="solid"/>
                       <a:round/>
                       <a:headEnd type="none" w="med" len="med"/>
                       <a:tailEnd type="none" w="med" len="med"/>
                     </a:lnB>
-                    <a:solidFill>
-                      <a:schemeClr val="tx1">
-                        <a:lumMod val="85000"/>
-                        <a:lumOff val="15000"/>
-                      </a:schemeClr>
-                    </a:solidFill>
                   </a:tcPr>
                 </a:tc>
                 <a:tc>
@@ -5000,7 +4924,7 @@
                       <a:r>
                         <a:rPr lang="en-GB" sz="3200" dirty="0">
                           <a:solidFill>
-                            <a:schemeClr val="bg1"/>
+                            <a:schemeClr val="tx1"/>
                           </a:solidFill>
                         </a:rPr>
                         <a:t>Averaging points</a:t>
@@ -5010,7 +4934,7 @@
                   <a:tcPr>
                     <a:lnL w="12700" cap="flat" cmpd="sng" algn="ctr">
                       <a:solidFill>
-                        <a:schemeClr val="bg1"/>
+                        <a:schemeClr val="tx1"/>
                       </a:solidFill>
                       <a:prstDash val="solid"/>
                       <a:round/>
@@ -5019,7 +4943,7 @@
                     </a:lnL>
                     <a:lnR w="12700" cap="flat" cmpd="sng" algn="ctr">
                       <a:solidFill>
-                        <a:schemeClr val="bg1"/>
+                        <a:schemeClr val="tx1"/>
                       </a:solidFill>
                       <a:prstDash val="solid"/>
                       <a:round/>
@@ -5028,7 +4952,7 @@
                     </a:lnR>
                     <a:lnT w="12700" cap="flat" cmpd="sng" algn="ctr">
                       <a:solidFill>
-                        <a:schemeClr val="bg1"/>
+                        <a:schemeClr val="tx1"/>
                       </a:solidFill>
                       <a:prstDash val="solid"/>
                       <a:round/>
@@ -5037,19 +4961,13 @@
                     </a:lnT>
                     <a:lnB w="12700" cap="flat" cmpd="sng" algn="ctr">
                       <a:solidFill>
-                        <a:schemeClr val="bg1"/>
+                        <a:schemeClr val="tx1"/>
                       </a:solidFill>
                       <a:prstDash val="solid"/>
                       <a:round/>
                       <a:headEnd type="none" w="med" len="med"/>
                       <a:tailEnd type="none" w="med" len="med"/>
                     </a:lnB>
-                    <a:solidFill>
-                      <a:schemeClr val="tx1">
-                        <a:lumMod val="85000"/>
-                        <a:lumOff val="15000"/>
-                      </a:schemeClr>
-                    </a:solidFill>
                   </a:tcPr>
                 </a:tc>
                 <a:extLst>
@@ -5067,7 +4985,7 @@
                       <a:r>
                         <a:rPr lang="en-GB" sz="3200" dirty="0">
                           <a:solidFill>
-                            <a:schemeClr val="bg1"/>
+                            <a:schemeClr val="tx1"/>
                           </a:solidFill>
                         </a:rPr>
                         <a:t>L/D</a:t>
@@ -5077,7 +4995,7 @@
                   <a:tcPr>
                     <a:lnL w="12700" cap="flat" cmpd="sng" algn="ctr">
                       <a:solidFill>
-                        <a:schemeClr val="bg1"/>
+                        <a:schemeClr val="tx1"/>
                       </a:solidFill>
                       <a:prstDash val="solid"/>
                       <a:round/>
@@ -5086,7 +5004,7 @@
                     </a:lnL>
                     <a:lnR w="12700" cap="flat" cmpd="sng" algn="ctr">
                       <a:solidFill>
-                        <a:schemeClr val="bg1"/>
+                        <a:schemeClr val="tx1"/>
                       </a:solidFill>
                       <a:prstDash val="solid"/>
                       <a:round/>
@@ -5095,7 +5013,7 @@
                     </a:lnR>
                     <a:lnT w="12700" cap="flat" cmpd="sng" algn="ctr">
                       <a:solidFill>
-                        <a:schemeClr val="bg1"/>
+                        <a:schemeClr val="tx1"/>
                       </a:solidFill>
                       <a:prstDash val="solid"/>
                       <a:round/>
@@ -5104,19 +5022,13 @@
                     </a:lnT>
                     <a:lnB w="12700" cap="flat" cmpd="sng" algn="ctr">
                       <a:solidFill>
-                        <a:schemeClr val="bg1"/>
+                        <a:schemeClr val="tx1"/>
                       </a:solidFill>
                       <a:prstDash val="solid"/>
                       <a:round/>
                       <a:headEnd type="none" w="med" len="med"/>
                       <a:tailEnd type="none" w="med" len="med"/>
                     </a:lnB>
-                    <a:solidFill>
-                      <a:schemeClr val="tx1">
-                        <a:lumMod val="85000"/>
-                        <a:lumOff val="15000"/>
-                      </a:schemeClr>
-                    </a:solidFill>
                   </a:tcPr>
                 </a:tc>
                 <a:tc>
@@ -5127,7 +5039,7 @@
                       <a:r>
                         <a:rPr lang="en-GB" sz="3200" dirty="0">
                           <a:solidFill>
-                            <a:schemeClr val="bg1"/>
+                            <a:schemeClr val="tx1"/>
                           </a:solidFill>
                         </a:rPr>
                         <a:t>494</a:t>
@@ -5137,7 +5049,7 @@
                   <a:tcPr>
                     <a:lnL w="12700" cap="flat" cmpd="sng" algn="ctr">
                       <a:solidFill>
-                        <a:schemeClr val="bg1"/>
+                        <a:schemeClr val="tx1"/>
                       </a:solidFill>
                       <a:prstDash val="solid"/>
                       <a:round/>
@@ -5146,7 +5058,7 @@
                     </a:lnL>
                     <a:lnR w="12700" cap="flat" cmpd="sng" algn="ctr">
                       <a:solidFill>
-                        <a:schemeClr val="bg1"/>
+                        <a:schemeClr val="tx1"/>
                       </a:solidFill>
                       <a:prstDash val="solid"/>
                       <a:round/>
@@ -5155,7 +5067,7 @@
                     </a:lnR>
                     <a:lnT w="12700" cap="flat" cmpd="sng" algn="ctr">
                       <a:solidFill>
-                        <a:schemeClr val="bg1"/>
+                        <a:schemeClr val="tx1"/>
                       </a:solidFill>
                       <a:prstDash val="solid"/>
                       <a:round/>
@@ -5164,19 +5076,13 @@
                     </a:lnT>
                     <a:lnB w="12700" cap="flat" cmpd="sng" algn="ctr">
                       <a:solidFill>
-                        <a:schemeClr val="bg1"/>
+                        <a:schemeClr val="tx1"/>
                       </a:solidFill>
                       <a:prstDash val="solid"/>
                       <a:round/>
                       <a:headEnd type="none" w="med" len="med"/>
                       <a:tailEnd type="none" w="med" len="med"/>
                     </a:lnB>
-                    <a:solidFill>
-                      <a:schemeClr val="tx1">
-                        <a:lumMod val="85000"/>
-                        <a:lumOff val="15000"/>
-                      </a:schemeClr>
-                    </a:solidFill>
                   </a:tcPr>
                 </a:tc>
                 <a:extLst>
@@ -5204,7 +5110,7 @@
           <p:nvPr>
             <p:extLst>
               <p:ext uri="{D42A27DB-BD31-4B8C-83A1-F6EECF244321}">
-                <p14:modId xmlns:p14="http://schemas.microsoft.com/office/powerpoint/2010/main" val="324997706"/>
+                <p14:modId xmlns:p14="http://schemas.microsoft.com/office/powerpoint/2010/main" val="1992290604"/>
               </p:ext>
             </p:extLst>
           </p:nvPr>
@@ -5217,7 +5123,7 @@
           <a:graphicData uri="http://schemas.openxmlformats.org/drawingml/2006/table">
             <a:tbl>
               <a:tblPr bandRow="1">
-                <a:tableStyleId>{D113A9D2-9D6B-4929-AA2D-F23B5EE8CBE7}</a:tableStyleId>
+                <a:tableStyleId>{5C22544A-7EE6-4342-B048-85BDC9FD1C3A}</a:tableStyleId>
               </a:tblPr>
               <a:tblGrid>
                 <a:gridCol w="2791325">
@@ -5244,7 +5150,7 @@
                       <a:r>
                         <a:rPr lang="en-GB" sz="3200" dirty="0">
                           <a:solidFill>
-                            <a:schemeClr val="bg1"/>
+                            <a:schemeClr val="tx1"/>
                           </a:solidFill>
                         </a:rPr>
                         <a:t>Starting</a:t>
@@ -5254,7 +5160,7 @@
                   <a:tcPr>
                     <a:lnL w="12700" cap="flat" cmpd="sng" algn="ctr">
                       <a:solidFill>
-                        <a:schemeClr val="bg1"/>
+                        <a:schemeClr val="tx1"/>
                       </a:solidFill>
                       <a:prstDash val="solid"/>
                       <a:round/>
@@ -5263,7 +5169,7 @@
                     </a:lnL>
                     <a:lnR w="12700" cap="flat" cmpd="sng" algn="ctr">
                       <a:solidFill>
-                        <a:schemeClr val="bg1"/>
+                        <a:schemeClr val="tx1"/>
                       </a:solidFill>
                       <a:prstDash val="solid"/>
                       <a:round/>
@@ -5272,7 +5178,7 @@
                     </a:lnR>
                     <a:lnT w="12700" cap="flat" cmpd="sng" algn="ctr">
                       <a:solidFill>
-                        <a:schemeClr val="bg1"/>
+                        <a:schemeClr val="tx1"/>
                       </a:solidFill>
                       <a:prstDash val="solid"/>
                       <a:round/>
@@ -5281,19 +5187,13 @@
                     </a:lnT>
                     <a:lnB w="12700" cap="flat" cmpd="sng" algn="ctr">
                       <a:solidFill>
-                        <a:schemeClr val="bg1"/>
+                        <a:schemeClr val="tx1"/>
                       </a:solidFill>
                       <a:prstDash val="solid"/>
                       <a:round/>
                       <a:headEnd type="none" w="med" len="med"/>
                       <a:tailEnd type="none" w="med" len="med"/>
                     </a:lnB>
-                    <a:solidFill>
-                      <a:schemeClr val="tx1">
-                        <a:lumMod val="85000"/>
-                        <a:lumOff val="15000"/>
-                      </a:schemeClr>
-                    </a:solidFill>
                   </a:tcPr>
                 </a:tc>
                 <a:tc>
@@ -5304,7 +5204,7 @@
                       <a:r>
                         <a:rPr lang="en-GB" sz="3200" dirty="0">
                           <a:solidFill>
-                            <a:schemeClr val="bg1"/>
+                            <a:schemeClr val="tx1"/>
                           </a:solidFill>
                         </a:rPr>
                         <a:t>Airfoils</a:t>
@@ -5314,7 +5214,7 @@
                   <a:tcPr>
                     <a:lnL w="12700" cap="flat" cmpd="sng" algn="ctr">
                       <a:solidFill>
-                        <a:schemeClr val="bg1"/>
+                        <a:schemeClr val="tx1"/>
                       </a:solidFill>
                       <a:prstDash val="solid"/>
                       <a:round/>
@@ -5323,7 +5223,7 @@
                     </a:lnL>
                     <a:lnR w="12700" cap="flat" cmpd="sng" algn="ctr">
                       <a:solidFill>
-                        <a:schemeClr val="bg1"/>
+                        <a:schemeClr val="tx1"/>
                       </a:solidFill>
                       <a:prstDash val="solid"/>
                       <a:round/>
@@ -5332,7 +5232,7 @@
                     </a:lnR>
                     <a:lnT w="12700" cap="flat" cmpd="sng" algn="ctr">
                       <a:solidFill>
-                        <a:schemeClr val="bg1"/>
+                        <a:schemeClr val="tx1"/>
                       </a:solidFill>
                       <a:prstDash val="solid"/>
                       <a:round/>
@@ -5341,19 +5241,13 @@
                     </a:lnT>
                     <a:lnB w="12700" cap="flat" cmpd="sng" algn="ctr">
                       <a:solidFill>
-                        <a:schemeClr val="bg1"/>
+                        <a:schemeClr val="tx1"/>
                       </a:solidFill>
                       <a:prstDash val="solid"/>
                       <a:round/>
                       <a:headEnd type="none" w="med" len="med"/>
                       <a:tailEnd type="none" w="med" len="med"/>
                     </a:lnB>
-                    <a:solidFill>
-                      <a:schemeClr val="tx1">
-                        <a:lumMod val="85000"/>
-                        <a:lumOff val="15000"/>
-                      </a:schemeClr>
-                    </a:solidFill>
                   </a:tcPr>
                 </a:tc>
                 <a:extLst>
@@ -5371,7 +5265,7 @@
                       <a:r>
                         <a:rPr lang="en-GB" sz="3200" dirty="0">
                           <a:solidFill>
-                            <a:schemeClr val="bg1"/>
+                            <a:schemeClr val="tx1"/>
                           </a:solidFill>
                         </a:rPr>
                         <a:t>Combining</a:t>
@@ -5381,7 +5275,7 @@
                   <a:tcPr>
                     <a:lnL w="12700" cap="flat" cmpd="sng" algn="ctr">
                       <a:solidFill>
-                        <a:schemeClr val="bg1"/>
+                        <a:schemeClr val="tx1"/>
                       </a:solidFill>
                       <a:prstDash val="solid"/>
                       <a:round/>
@@ -5390,7 +5284,7 @@
                     </a:lnL>
                     <a:lnR w="12700" cap="flat" cmpd="sng" algn="ctr">
                       <a:solidFill>
-                        <a:schemeClr val="bg1"/>
+                        <a:schemeClr val="tx1"/>
                       </a:solidFill>
                       <a:prstDash val="solid"/>
                       <a:round/>
@@ -5399,7 +5293,7 @@
                     </a:lnR>
                     <a:lnT w="12700" cap="flat" cmpd="sng" algn="ctr">
                       <a:solidFill>
-                        <a:schemeClr val="bg1"/>
+                        <a:schemeClr val="tx1"/>
                       </a:solidFill>
                       <a:prstDash val="solid"/>
                       <a:round/>
@@ -5408,19 +5302,13 @@
                     </a:lnT>
                     <a:lnB w="12700" cap="flat" cmpd="sng" algn="ctr">
                       <a:solidFill>
-                        <a:schemeClr val="bg1"/>
+                        <a:schemeClr val="tx1"/>
                       </a:solidFill>
                       <a:prstDash val="solid"/>
                       <a:round/>
                       <a:headEnd type="none" w="med" len="med"/>
                       <a:tailEnd type="none" w="med" len="med"/>
                     </a:lnB>
-                    <a:solidFill>
-                      <a:schemeClr val="tx1">
-                        <a:lumMod val="85000"/>
-                        <a:lumOff val="15000"/>
-                      </a:schemeClr>
-                    </a:solidFill>
                   </a:tcPr>
                 </a:tc>
                 <a:tc>
@@ -5431,7 +5319,7 @@
                       <a:r>
                         <a:rPr lang="en-GB" sz="3200" dirty="0">
                           <a:solidFill>
-                            <a:schemeClr val="bg1"/>
+                            <a:schemeClr val="tx1"/>
                           </a:solidFill>
                         </a:rPr>
                         <a:t>Average parameters</a:t>
@@ -5441,7 +5329,7 @@
                   <a:tcPr>
                     <a:lnL w="12700" cap="flat" cmpd="sng" algn="ctr">
                       <a:solidFill>
-                        <a:schemeClr val="bg1"/>
+                        <a:schemeClr val="tx1"/>
                       </a:solidFill>
                       <a:prstDash val="solid"/>
                       <a:round/>
@@ -5450,7 +5338,7 @@
                     </a:lnL>
                     <a:lnR w="12700" cap="flat" cmpd="sng" algn="ctr">
                       <a:solidFill>
-                        <a:schemeClr val="bg1"/>
+                        <a:schemeClr val="tx1"/>
                       </a:solidFill>
                       <a:prstDash val="solid"/>
                       <a:round/>
@@ -5459,7 +5347,7 @@
                     </a:lnR>
                     <a:lnT w="12700" cap="flat" cmpd="sng" algn="ctr">
                       <a:solidFill>
-                        <a:schemeClr val="bg1"/>
+                        <a:schemeClr val="tx1"/>
                       </a:solidFill>
                       <a:prstDash val="solid"/>
                       <a:round/>
@@ -5468,19 +5356,13 @@
                     </a:lnT>
                     <a:lnB w="12700" cap="flat" cmpd="sng" algn="ctr">
                       <a:solidFill>
-                        <a:schemeClr val="bg1"/>
+                        <a:schemeClr val="tx1"/>
                       </a:solidFill>
                       <a:prstDash val="solid"/>
                       <a:round/>
                       <a:headEnd type="none" w="med" len="med"/>
                       <a:tailEnd type="none" w="med" len="med"/>
                     </a:lnB>
-                    <a:solidFill>
-                      <a:schemeClr val="tx1">
-                        <a:lumMod val="85000"/>
-                        <a:lumOff val="15000"/>
-                      </a:schemeClr>
-                    </a:solidFill>
                   </a:tcPr>
                 </a:tc>
                 <a:extLst>
@@ -5498,7 +5380,7 @@
                       <a:r>
                         <a:rPr lang="en-GB" sz="3200" dirty="0">
                           <a:solidFill>
-                            <a:schemeClr val="bg1"/>
+                            <a:schemeClr val="tx1"/>
                           </a:solidFill>
                         </a:rPr>
                         <a:t>L/D</a:t>
@@ -5508,7 +5390,7 @@
                   <a:tcPr>
                     <a:lnL w="12700" cap="flat" cmpd="sng" algn="ctr">
                       <a:solidFill>
-                        <a:schemeClr val="bg1"/>
+                        <a:schemeClr val="tx1"/>
                       </a:solidFill>
                       <a:prstDash val="solid"/>
                       <a:round/>
@@ -5517,7 +5399,7 @@
                     </a:lnL>
                     <a:lnR w="12700" cap="flat" cmpd="sng" algn="ctr">
                       <a:solidFill>
-                        <a:schemeClr val="bg1"/>
+                        <a:schemeClr val="tx1"/>
                       </a:solidFill>
                       <a:prstDash val="solid"/>
                       <a:round/>
@@ -5526,7 +5408,7 @@
                     </a:lnR>
                     <a:lnT w="12700" cap="flat" cmpd="sng" algn="ctr">
                       <a:solidFill>
-                        <a:schemeClr val="bg1"/>
+                        <a:schemeClr val="tx1"/>
                       </a:solidFill>
                       <a:prstDash val="solid"/>
                       <a:round/>
@@ -5535,19 +5417,13 @@
                     </a:lnT>
                     <a:lnB w="12700" cap="flat" cmpd="sng" algn="ctr">
                       <a:solidFill>
-                        <a:schemeClr val="bg1"/>
+                        <a:schemeClr val="tx1"/>
                       </a:solidFill>
                       <a:prstDash val="solid"/>
                       <a:round/>
                       <a:headEnd type="none" w="med" len="med"/>
                       <a:tailEnd type="none" w="med" len="med"/>
                     </a:lnB>
-                    <a:solidFill>
-                      <a:schemeClr val="tx1">
-                        <a:lumMod val="85000"/>
-                        <a:lumOff val="15000"/>
-                      </a:schemeClr>
-                    </a:solidFill>
                   </a:tcPr>
                 </a:tc>
                 <a:tc>
@@ -5557,7 +5433,7 @@
                     <a:p>
                       <a:endParaRPr lang="en-GB" sz="3200" dirty="0">
                         <a:solidFill>
-                          <a:schemeClr val="bg1"/>
+                          <a:schemeClr val="tx1"/>
                         </a:solidFill>
                       </a:endParaRPr>
                     </a:p>
@@ -5565,7 +5441,7 @@
                   <a:tcPr>
                     <a:lnL w="12700" cap="flat" cmpd="sng" algn="ctr">
                       <a:solidFill>
-                        <a:schemeClr val="bg1"/>
+                        <a:schemeClr val="tx1"/>
                       </a:solidFill>
                       <a:prstDash val="solid"/>
                       <a:round/>
@@ -5574,7 +5450,7 @@
                     </a:lnL>
                     <a:lnR w="12700" cap="flat" cmpd="sng" algn="ctr">
                       <a:solidFill>
-                        <a:schemeClr val="bg1"/>
+                        <a:schemeClr val="tx1"/>
                       </a:solidFill>
                       <a:prstDash val="solid"/>
                       <a:round/>
@@ -5583,7 +5459,7 @@
                     </a:lnR>
                     <a:lnT w="12700" cap="flat" cmpd="sng" algn="ctr">
                       <a:solidFill>
-                        <a:schemeClr val="bg1"/>
+                        <a:schemeClr val="tx1"/>
                       </a:solidFill>
                       <a:prstDash val="solid"/>
                       <a:round/>
@@ -5592,19 +5468,13 @@
                     </a:lnT>
                     <a:lnB w="12700" cap="flat" cmpd="sng" algn="ctr">
                       <a:solidFill>
-                        <a:schemeClr val="bg1"/>
+                        <a:schemeClr val="tx1"/>
                       </a:solidFill>
                       <a:prstDash val="solid"/>
                       <a:round/>
                       <a:headEnd type="none" w="med" len="med"/>
                       <a:tailEnd type="none" w="med" len="med"/>
                     </a:lnB>
-                    <a:solidFill>
-                      <a:schemeClr val="tx1">
-                        <a:lumMod val="85000"/>
-                        <a:lumOff val="15000"/>
-                      </a:schemeClr>
-                    </a:solidFill>
                   </a:tcPr>
                 </a:tc>
                 <a:extLst>
@@ -5694,6 +5564,946 @@
           </a:prstGeom>
         </p:spPr>
       </p:pic>
+      <p:sp>
+        <p:nvSpPr>
+          <p:cNvPr id="9" name="Rectangle 8">
+            <a:extLst>
+              <a:ext uri="{FF2B5EF4-FFF2-40B4-BE49-F238E27FC236}">
+                <a16:creationId xmlns:a16="http://schemas.microsoft.com/office/drawing/2014/main" id="{B17AA5DA-5A66-A47D-D195-1C96A0378EDD}"/>
+              </a:ext>
+            </a:extLst>
+          </p:cNvPr>
+          <p:cNvSpPr/>
+          <p:nvPr/>
+        </p:nvSpPr>
+        <p:spPr>
+          <a:xfrm>
+            <a:off x="15718970" y="3360604"/>
+            <a:ext cx="5665029" cy="5047200"/>
+          </a:xfrm>
+          <a:prstGeom prst="rect">
+            <a:avLst/>
+          </a:prstGeom>
+          <a:noFill/>
+          <a:ln w="76200">
+            <a:solidFill>
+              <a:schemeClr val="tx1"/>
+            </a:solidFill>
+          </a:ln>
+        </p:spPr>
+        <p:style>
+          <a:lnRef idx="2">
+            <a:schemeClr val="accent1">
+              <a:shade val="15000"/>
+            </a:schemeClr>
+          </a:lnRef>
+          <a:fillRef idx="1">
+            <a:schemeClr val="accent1"/>
+          </a:fillRef>
+          <a:effectRef idx="0">
+            <a:schemeClr val="accent1"/>
+          </a:effectRef>
+          <a:fontRef idx="minor">
+            <a:schemeClr val="lt1"/>
+          </a:fontRef>
+        </p:style>
+        <p:txBody>
+          <a:bodyPr rtlCol="0" anchor="t"/>
+          <a:lstStyle/>
+          <a:p>
+            <a:pPr algn="ctr"/>
+            <a:r>
+              <a:rPr lang="en-GB" sz="4800" b="1" u="sng" dirty="0">
+                <a:solidFill>
+                  <a:schemeClr val="tx1"/>
+                </a:solidFill>
+              </a:rPr>
+              <a:t>Parameters</a:t>
+            </a:r>
+            <a:endParaRPr lang="en-GB" sz="3200" dirty="0">
+              <a:solidFill>
+                <a:schemeClr val="tx1"/>
+              </a:solidFill>
+            </a:endParaRPr>
+          </a:p>
+          <a:p>
+            <a:pPr algn="ctr"/>
+            <a:endParaRPr lang="en-GB" sz="3200" dirty="0">
+              <a:solidFill>
+                <a:srgbClr val="000066"/>
+              </a:solidFill>
+            </a:endParaRPr>
+          </a:p>
+        </p:txBody>
+      </p:sp>
+      <p:graphicFrame>
+        <p:nvGraphicFramePr>
+          <p:cNvPr id="10" name="Table 9">
+            <a:extLst>
+              <a:ext uri="{FF2B5EF4-FFF2-40B4-BE49-F238E27FC236}">
+                <a16:creationId xmlns:a16="http://schemas.microsoft.com/office/drawing/2014/main" id="{4DA8E00B-92D1-F108-BFDA-D2904E18A23C}"/>
+              </a:ext>
+            </a:extLst>
+          </p:cNvPr>
+          <p:cNvGraphicFramePr>
+            <a:graphicFrameLocks noGrp="1"/>
+          </p:cNvGraphicFramePr>
+          <p:nvPr>
+            <p:extLst>
+              <p:ext uri="{D42A27DB-BD31-4B8C-83A1-F6EECF244321}">
+                <p14:modId xmlns:p14="http://schemas.microsoft.com/office/powerpoint/2010/main" val="3909405096"/>
+              </p:ext>
+            </p:extLst>
+          </p:nvPr>
+        </p:nvGraphicFramePr>
+        <p:xfrm>
+          <a:off x="15904851" y="4202580"/>
+          <a:ext cx="5293266" cy="3962400"/>
+        </p:xfrm>
+        <a:graphic>
+          <a:graphicData uri="http://schemas.openxmlformats.org/drawingml/2006/table">
+            <a:tbl>
+              <a:tblPr bandRow="1">
+                <a:tableStyleId>{5C22544A-7EE6-4342-B048-85BDC9FD1C3A}</a:tableStyleId>
+              </a:tblPr>
+              <a:tblGrid>
+                <a:gridCol w="2646633">
+                  <a:extLst>
+                    <a:ext uri="{9D8B030D-6E8A-4147-A177-3AD203B41FA5}">
+                      <a16:colId xmlns:a16="http://schemas.microsoft.com/office/drawing/2014/main" val="60010660"/>
+                    </a:ext>
+                  </a:extLst>
+                </a:gridCol>
+                <a:gridCol w="2646633">
+                  <a:extLst>
+                    <a:ext uri="{9D8B030D-6E8A-4147-A177-3AD203B41FA5}">
+                      <a16:colId xmlns:a16="http://schemas.microsoft.com/office/drawing/2014/main" val="693575796"/>
+                    </a:ext>
+                  </a:extLst>
+                </a:gridCol>
+              </a:tblGrid>
+              <a:tr h="370840">
+                <a:tc>
+                  <a:txBody>
+                    <a:bodyPr/>
+                    <a:lstStyle/>
+                    <a:p>
+                      <a:r>
+                        <a:rPr lang="en-GB" sz="3200" dirty="0"/>
+                        <a:t>Population</a:t>
+                      </a:r>
+                    </a:p>
+                  </a:txBody>
+                  <a:tcPr>
+                    <a:lnL w="12700" cap="flat" cmpd="sng" algn="ctr">
+                      <a:solidFill>
+                        <a:schemeClr val="tx1"/>
+                      </a:solidFill>
+                      <a:prstDash val="solid"/>
+                      <a:round/>
+                      <a:headEnd type="none" w="med" len="med"/>
+                      <a:tailEnd type="none" w="med" len="med"/>
+                    </a:lnL>
+                    <a:lnR w="12700" cap="flat" cmpd="sng" algn="ctr">
+                      <a:solidFill>
+                        <a:schemeClr val="tx1"/>
+                      </a:solidFill>
+                      <a:prstDash val="solid"/>
+                      <a:round/>
+                      <a:headEnd type="none" w="med" len="med"/>
+                      <a:tailEnd type="none" w="med" len="med"/>
+                    </a:lnR>
+                    <a:lnT w="12700" cap="flat" cmpd="sng" algn="ctr">
+                      <a:solidFill>
+                        <a:schemeClr val="tx1"/>
+                      </a:solidFill>
+                      <a:prstDash val="solid"/>
+                      <a:round/>
+                      <a:headEnd type="none" w="med" len="med"/>
+                      <a:tailEnd type="none" w="med" len="med"/>
+                    </a:lnT>
+                    <a:lnB w="12700" cap="flat" cmpd="sng" algn="ctr">
+                      <a:solidFill>
+                        <a:schemeClr val="tx1"/>
+                      </a:solidFill>
+                      <a:prstDash val="solid"/>
+                      <a:round/>
+                      <a:headEnd type="none" w="med" len="med"/>
+                      <a:tailEnd type="none" w="med" len="med"/>
+                    </a:lnB>
+                    <a:lnTlToBr w="12700" cmpd="sng">
+                      <a:noFill/>
+                      <a:prstDash val="solid"/>
+                    </a:lnTlToBr>
+                    <a:lnBlToTr w="12700" cmpd="sng">
+                      <a:noFill/>
+                      <a:prstDash val="solid"/>
+                    </a:lnBlToTr>
+                  </a:tcPr>
+                </a:tc>
+                <a:tc>
+                  <a:txBody>
+                    <a:bodyPr/>
+                    <a:lstStyle/>
+                    <a:p>
+                      <a:r>
+                        <a:rPr lang="en-GB" sz="3200" dirty="0"/>
+                        <a:t>10,000</a:t>
+                      </a:r>
+                    </a:p>
+                  </a:txBody>
+                  <a:tcPr>
+                    <a:lnL w="12700" cap="flat" cmpd="sng" algn="ctr">
+                      <a:solidFill>
+                        <a:schemeClr val="tx1"/>
+                      </a:solidFill>
+                      <a:prstDash val="solid"/>
+                      <a:round/>
+                      <a:headEnd type="none" w="med" len="med"/>
+                      <a:tailEnd type="none" w="med" len="med"/>
+                    </a:lnL>
+                    <a:lnR w="12700" cap="flat" cmpd="sng" algn="ctr">
+                      <a:solidFill>
+                        <a:schemeClr val="tx1"/>
+                      </a:solidFill>
+                      <a:prstDash val="solid"/>
+                      <a:round/>
+                      <a:headEnd type="none" w="med" len="med"/>
+                      <a:tailEnd type="none" w="med" len="med"/>
+                    </a:lnR>
+                    <a:lnT w="12700" cap="flat" cmpd="sng" algn="ctr">
+                      <a:solidFill>
+                        <a:schemeClr val="tx1"/>
+                      </a:solidFill>
+                      <a:prstDash val="solid"/>
+                      <a:round/>
+                      <a:headEnd type="none" w="med" len="med"/>
+                      <a:tailEnd type="none" w="med" len="med"/>
+                    </a:lnT>
+                    <a:lnB w="12700" cap="flat" cmpd="sng" algn="ctr">
+                      <a:solidFill>
+                        <a:schemeClr val="tx1"/>
+                      </a:solidFill>
+                      <a:prstDash val="solid"/>
+                      <a:round/>
+                      <a:headEnd type="none" w="med" len="med"/>
+                      <a:tailEnd type="none" w="med" len="med"/>
+                    </a:lnB>
+                    <a:lnTlToBr w="12700" cmpd="sng">
+                      <a:noFill/>
+                      <a:prstDash val="solid"/>
+                    </a:lnTlToBr>
+                    <a:lnBlToTr w="12700" cmpd="sng">
+                      <a:noFill/>
+                      <a:prstDash val="solid"/>
+                    </a:lnBlToTr>
+                  </a:tcPr>
+                </a:tc>
+                <a:extLst>
+                  <a:ext uri="{0D108BD9-81ED-4DB2-BD59-A6C34878D82A}">
+                    <a16:rowId xmlns:a16="http://schemas.microsoft.com/office/drawing/2014/main" val="1953700105"/>
+                  </a:ext>
+                </a:extLst>
+              </a:tr>
+              <a:tr h="370840">
+                <a:tc>
+                  <a:txBody>
+                    <a:bodyPr/>
+                    <a:lstStyle/>
+                    <a:p>
+                      <a:r>
+                        <a:rPr lang="en-GB" sz="3200" dirty="0"/>
+                        <a:t>Mutation rate</a:t>
+                      </a:r>
+                    </a:p>
+                  </a:txBody>
+                  <a:tcPr>
+                    <a:lnL w="12700" cap="flat" cmpd="sng" algn="ctr">
+                      <a:solidFill>
+                        <a:schemeClr val="tx1"/>
+                      </a:solidFill>
+                      <a:prstDash val="solid"/>
+                      <a:round/>
+                      <a:headEnd type="none" w="med" len="med"/>
+                      <a:tailEnd type="none" w="med" len="med"/>
+                    </a:lnL>
+                    <a:lnR w="12700" cap="flat" cmpd="sng" algn="ctr">
+                      <a:solidFill>
+                        <a:schemeClr val="tx1"/>
+                      </a:solidFill>
+                      <a:prstDash val="solid"/>
+                      <a:round/>
+                      <a:headEnd type="none" w="med" len="med"/>
+                      <a:tailEnd type="none" w="med" len="med"/>
+                    </a:lnR>
+                    <a:lnT w="12700" cap="flat" cmpd="sng" algn="ctr">
+                      <a:solidFill>
+                        <a:schemeClr val="tx1"/>
+                      </a:solidFill>
+                      <a:prstDash val="solid"/>
+                      <a:round/>
+                      <a:headEnd type="none" w="med" len="med"/>
+                      <a:tailEnd type="none" w="med" len="med"/>
+                    </a:lnT>
+                    <a:lnB w="12700" cap="flat" cmpd="sng" algn="ctr">
+                      <a:solidFill>
+                        <a:schemeClr val="tx1"/>
+                      </a:solidFill>
+                      <a:prstDash val="solid"/>
+                      <a:round/>
+                      <a:headEnd type="none" w="med" len="med"/>
+                      <a:tailEnd type="none" w="med" len="med"/>
+                    </a:lnB>
+                    <a:lnTlToBr w="12700" cmpd="sng">
+                      <a:noFill/>
+                      <a:prstDash val="solid"/>
+                    </a:lnTlToBr>
+                    <a:lnBlToTr w="12700" cmpd="sng">
+                      <a:noFill/>
+                      <a:prstDash val="solid"/>
+                    </a:lnBlToTr>
+                  </a:tcPr>
+                </a:tc>
+                <a:tc>
+                  <a:txBody>
+                    <a:bodyPr/>
+                    <a:lstStyle/>
+                    <a:p>
+                      <a:r>
+                        <a:rPr lang="en-GB" sz="3200" dirty="0"/>
+                        <a:t>5%</a:t>
+                      </a:r>
+                    </a:p>
+                  </a:txBody>
+                  <a:tcPr>
+                    <a:lnL w="12700" cap="flat" cmpd="sng" algn="ctr">
+                      <a:solidFill>
+                        <a:schemeClr val="tx1"/>
+                      </a:solidFill>
+                      <a:prstDash val="solid"/>
+                      <a:round/>
+                      <a:headEnd type="none" w="med" len="med"/>
+                      <a:tailEnd type="none" w="med" len="med"/>
+                    </a:lnL>
+                    <a:lnR w="12700" cap="flat" cmpd="sng" algn="ctr">
+                      <a:solidFill>
+                        <a:schemeClr val="tx1"/>
+                      </a:solidFill>
+                      <a:prstDash val="solid"/>
+                      <a:round/>
+                      <a:headEnd type="none" w="med" len="med"/>
+                      <a:tailEnd type="none" w="med" len="med"/>
+                    </a:lnR>
+                    <a:lnT w="12700" cap="flat" cmpd="sng" algn="ctr">
+                      <a:solidFill>
+                        <a:schemeClr val="tx1"/>
+                      </a:solidFill>
+                      <a:prstDash val="solid"/>
+                      <a:round/>
+                      <a:headEnd type="none" w="med" len="med"/>
+                      <a:tailEnd type="none" w="med" len="med"/>
+                    </a:lnT>
+                    <a:lnB w="12700" cap="flat" cmpd="sng" algn="ctr">
+                      <a:solidFill>
+                        <a:schemeClr val="tx1"/>
+                      </a:solidFill>
+                      <a:prstDash val="solid"/>
+                      <a:round/>
+                      <a:headEnd type="none" w="med" len="med"/>
+                      <a:tailEnd type="none" w="med" len="med"/>
+                    </a:lnB>
+                    <a:lnTlToBr w="12700" cmpd="sng">
+                      <a:noFill/>
+                      <a:prstDash val="solid"/>
+                    </a:lnTlToBr>
+                    <a:lnBlToTr w="12700" cmpd="sng">
+                      <a:noFill/>
+                      <a:prstDash val="solid"/>
+                    </a:lnBlToTr>
+                  </a:tcPr>
+                </a:tc>
+                <a:extLst>
+                  <a:ext uri="{0D108BD9-81ED-4DB2-BD59-A6C34878D82A}">
+                    <a16:rowId xmlns:a16="http://schemas.microsoft.com/office/drawing/2014/main" val="4220338563"/>
+                  </a:ext>
+                </a:extLst>
+              </a:tr>
+              <a:tr h="370840">
+                <a:tc>
+                  <a:txBody>
+                    <a:bodyPr/>
+                    <a:lstStyle/>
+                    <a:p>
+                      <a:r>
+                        <a:rPr lang="en-GB" sz="3200" dirty="0"/>
+                        <a:t>Elites</a:t>
+                      </a:r>
+                    </a:p>
+                  </a:txBody>
+                  <a:tcPr>
+                    <a:lnL w="12700" cap="flat" cmpd="sng" algn="ctr">
+                      <a:solidFill>
+                        <a:schemeClr val="tx1"/>
+                      </a:solidFill>
+                      <a:prstDash val="solid"/>
+                      <a:round/>
+                      <a:headEnd type="none" w="med" len="med"/>
+                      <a:tailEnd type="none" w="med" len="med"/>
+                    </a:lnL>
+                    <a:lnR w="12700" cap="flat" cmpd="sng" algn="ctr">
+                      <a:solidFill>
+                        <a:schemeClr val="tx1"/>
+                      </a:solidFill>
+                      <a:prstDash val="solid"/>
+                      <a:round/>
+                      <a:headEnd type="none" w="med" len="med"/>
+                      <a:tailEnd type="none" w="med" len="med"/>
+                    </a:lnR>
+                    <a:lnT w="12700" cap="flat" cmpd="sng" algn="ctr">
+                      <a:solidFill>
+                        <a:schemeClr val="tx1"/>
+                      </a:solidFill>
+                      <a:prstDash val="solid"/>
+                      <a:round/>
+                      <a:headEnd type="none" w="med" len="med"/>
+                      <a:tailEnd type="none" w="med" len="med"/>
+                    </a:lnT>
+                    <a:lnB w="12700" cap="flat" cmpd="sng" algn="ctr">
+                      <a:solidFill>
+                        <a:schemeClr val="tx1"/>
+                      </a:solidFill>
+                      <a:prstDash val="solid"/>
+                      <a:round/>
+                      <a:headEnd type="none" w="med" len="med"/>
+                      <a:tailEnd type="none" w="med" len="med"/>
+                    </a:lnB>
+                    <a:lnTlToBr w="12700" cmpd="sng">
+                      <a:noFill/>
+                      <a:prstDash val="solid"/>
+                    </a:lnTlToBr>
+                    <a:lnBlToTr w="12700" cmpd="sng">
+                      <a:noFill/>
+                      <a:prstDash val="solid"/>
+                    </a:lnBlToTr>
+                  </a:tcPr>
+                </a:tc>
+                <a:tc>
+                  <a:txBody>
+                    <a:bodyPr/>
+                    <a:lstStyle/>
+                    <a:p>
+                      <a:r>
+                        <a:rPr lang="en-GB" sz="3200" dirty="0"/>
+                        <a:t>50</a:t>
+                      </a:r>
+                    </a:p>
+                  </a:txBody>
+                  <a:tcPr>
+                    <a:lnL w="12700" cap="flat" cmpd="sng" algn="ctr">
+                      <a:solidFill>
+                        <a:schemeClr val="tx1"/>
+                      </a:solidFill>
+                      <a:prstDash val="solid"/>
+                      <a:round/>
+                      <a:headEnd type="none" w="med" len="med"/>
+                      <a:tailEnd type="none" w="med" len="med"/>
+                    </a:lnL>
+                    <a:lnR w="12700" cap="flat" cmpd="sng" algn="ctr">
+                      <a:solidFill>
+                        <a:schemeClr val="tx1"/>
+                      </a:solidFill>
+                      <a:prstDash val="solid"/>
+                      <a:round/>
+                      <a:headEnd type="none" w="med" len="med"/>
+                      <a:tailEnd type="none" w="med" len="med"/>
+                    </a:lnR>
+                    <a:lnT w="12700" cap="flat" cmpd="sng" algn="ctr">
+                      <a:solidFill>
+                        <a:schemeClr val="tx1"/>
+                      </a:solidFill>
+                      <a:prstDash val="solid"/>
+                      <a:round/>
+                      <a:headEnd type="none" w="med" len="med"/>
+                      <a:tailEnd type="none" w="med" len="med"/>
+                    </a:lnT>
+                    <a:lnB w="12700" cap="flat" cmpd="sng" algn="ctr">
+                      <a:solidFill>
+                        <a:schemeClr val="tx1"/>
+                      </a:solidFill>
+                      <a:prstDash val="solid"/>
+                      <a:round/>
+                      <a:headEnd type="none" w="med" len="med"/>
+                      <a:tailEnd type="none" w="med" len="med"/>
+                    </a:lnB>
+                    <a:lnTlToBr w="12700" cmpd="sng">
+                      <a:noFill/>
+                      <a:prstDash val="solid"/>
+                    </a:lnTlToBr>
+                    <a:lnBlToTr w="12700" cmpd="sng">
+                      <a:noFill/>
+                      <a:prstDash val="solid"/>
+                    </a:lnBlToTr>
+                  </a:tcPr>
+                </a:tc>
+                <a:extLst>
+                  <a:ext uri="{0D108BD9-81ED-4DB2-BD59-A6C34878D82A}">
+                    <a16:rowId xmlns:a16="http://schemas.microsoft.com/office/drawing/2014/main" val="2226160935"/>
+                  </a:ext>
+                </a:extLst>
+              </a:tr>
+              <a:tr h="370840">
+                <a:tc>
+                  <a:txBody>
+                    <a:bodyPr/>
+                    <a:lstStyle/>
+                    <a:p>
+                      <a:r>
+                        <a:rPr lang="en-GB" sz="3200" dirty="0"/>
+                        <a:t>Generations</a:t>
+                      </a:r>
+                    </a:p>
+                  </a:txBody>
+                  <a:tcPr>
+                    <a:lnL w="12700" cap="flat" cmpd="sng" algn="ctr">
+                      <a:solidFill>
+                        <a:schemeClr val="tx1"/>
+                      </a:solidFill>
+                      <a:prstDash val="solid"/>
+                      <a:round/>
+                      <a:headEnd type="none" w="med" len="med"/>
+                      <a:tailEnd type="none" w="med" len="med"/>
+                    </a:lnL>
+                    <a:lnR w="12700" cap="flat" cmpd="sng" algn="ctr">
+                      <a:solidFill>
+                        <a:schemeClr val="tx1"/>
+                      </a:solidFill>
+                      <a:prstDash val="solid"/>
+                      <a:round/>
+                      <a:headEnd type="none" w="med" len="med"/>
+                      <a:tailEnd type="none" w="med" len="med"/>
+                    </a:lnR>
+                    <a:lnT w="12700" cap="flat" cmpd="sng" algn="ctr">
+                      <a:solidFill>
+                        <a:schemeClr val="tx1"/>
+                      </a:solidFill>
+                      <a:prstDash val="solid"/>
+                      <a:round/>
+                      <a:headEnd type="none" w="med" len="med"/>
+                      <a:tailEnd type="none" w="med" len="med"/>
+                    </a:lnT>
+                    <a:lnB w="12700" cap="flat" cmpd="sng" algn="ctr">
+                      <a:solidFill>
+                        <a:schemeClr val="tx1"/>
+                      </a:solidFill>
+                      <a:prstDash val="solid"/>
+                      <a:round/>
+                      <a:headEnd type="none" w="med" len="med"/>
+                      <a:tailEnd type="none" w="med" len="med"/>
+                    </a:lnB>
+                    <a:lnTlToBr w="12700" cmpd="sng">
+                      <a:noFill/>
+                      <a:prstDash val="solid"/>
+                    </a:lnTlToBr>
+                    <a:lnBlToTr w="12700" cmpd="sng">
+                      <a:noFill/>
+                      <a:prstDash val="solid"/>
+                    </a:lnBlToTr>
+                  </a:tcPr>
+                </a:tc>
+                <a:tc>
+                  <a:txBody>
+                    <a:bodyPr/>
+                    <a:lstStyle/>
+                    <a:p>
+                      <a:r>
+                        <a:rPr lang="en-GB" sz="3200" dirty="0"/>
+                        <a:t>1750</a:t>
+                      </a:r>
+                    </a:p>
+                  </a:txBody>
+                  <a:tcPr>
+                    <a:lnL w="12700" cap="flat" cmpd="sng" algn="ctr">
+                      <a:solidFill>
+                        <a:schemeClr val="tx1"/>
+                      </a:solidFill>
+                      <a:prstDash val="solid"/>
+                      <a:round/>
+                      <a:headEnd type="none" w="med" len="med"/>
+                      <a:tailEnd type="none" w="med" len="med"/>
+                    </a:lnL>
+                    <a:lnR w="12700" cap="flat" cmpd="sng" algn="ctr">
+                      <a:solidFill>
+                        <a:schemeClr val="tx1"/>
+                      </a:solidFill>
+                      <a:prstDash val="solid"/>
+                      <a:round/>
+                      <a:headEnd type="none" w="med" len="med"/>
+                      <a:tailEnd type="none" w="med" len="med"/>
+                    </a:lnR>
+                    <a:lnT w="12700" cap="flat" cmpd="sng" algn="ctr">
+                      <a:solidFill>
+                        <a:schemeClr val="tx1"/>
+                      </a:solidFill>
+                      <a:prstDash val="solid"/>
+                      <a:round/>
+                      <a:headEnd type="none" w="med" len="med"/>
+                      <a:tailEnd type="none" w="med" len="med"/>
+                    </a:lnT>
+                    <a:lnB w="12700" cap="flat" cmpd="sng" algn="ctr">
+                      <a:solidFill>
+                        <a:schemeClr val="tx1"/>
+                      </a:solidFill>
+                      <a:prstDash val="solid"/>
+                      <a:round/>
+                      <a:headEnd type="none" w="med" len="med"/>
+                      <a:tailEnd type="none" w="med" len="med"/>
+                    </a:lnB>
+                    <a:lnTlToBr w="12700" cmpd="sng">
+                      <a:noFill/>
+                      <a:prstDash val="solid"/>
+                    </a:lnTlToBr>
+                    <a:lnBlToTr w="12700" cmpd="sng">
+                      <a:noFill/>
+                      <a:prstDash val="solid"/>
+                    </a:lnBlToTr>
+                  </a:tcPr>
+                </a:tc>
+                <a:extLst>
+                  <a:ext uri="{0D108BD9-81ED-4DB2-BD59-A6C34878D82A}">
+                    <a16:rowId xmlns:a16="http://schemas.microsoft.com/office/drawing/2014/main" val="54078794"/>
+                  </a:ext>
+                </a:extLst>
+              </a:tr>
+              <a:tr h="370840">
+                <a:tc>
+                  <a:txBody>
+                    <a:bodyPr/>
+                    <a:lstStyle/>
+                    <a:p>
+                      <a:r>
+                        <a:rPr lang="en-GB" sz="3200" dirty="0"/>
+                        <a:t>Selection</a:t>
+                      </a:r>
+                    </a:p>
+                  </a:txBody>
+                  <a:tcPr>
+                    <a:lnL w="12700" cap="flat" cmpd="sng" algn="ctr">
+                      <a:solidFill>
+                        <a:schemeClr val="tx1"/>
+                      </a:solidFill>
+                      <a:prstDash val="solid"/>
+                      <a:round/>
+                      <a:headEnd type="none" w="med" len="med"/>
+                      <a:tailEnd type="none" w="med" len="med"/>
+                    </a:lnL>
+                    <a:lnR w="12700" cap="flat" cmpd="sng" algn="ctr">
+                      <a:solidFill>
+                        <a:schemeClr val="tx1"/>
+                      </a:solidFill>
+                      <a:prstDash val="solid"/>
+                      <a:round/>
+                      <a:headEnd type="none" w="med" len="med"/>
+                      <a:tailEnd type="none" w="med" len="med"/>
+                    </a:lnR>
+                    <a:lnT w="12700" cap="flat" cmpd="sng" algn="ctr">
+                      <a:solidFill>
+                        <a:schemeClr val="tx1"/>
+                      </a:solidFill>
+                      <a:prstDash val="solid"/>
+                      <a:round/>
+                      <a:headEnd type="none" w="med" len="med"/>
+                      <a:tailEnd type="none" w="med" len="med"/>
+                    </a:lnT>
+                    <a:lnB w="12700" cap="flat" cmpd="sng" algn="ctr">
+                      <a:solidFill>
+                        <a:schemeClr val="tx1"/>
+                      </a:solidFill>
+                      <a:prstDash val="solid"/>
+                      <a:round/>
+                      <a:headEnd type="none" w="med" len="med"/>
+                      <a:tailEnd type="none" w="med" len="med"/>
+                    </a:lnB>
+                    <a:lnTlToBr w="12700" cmpd="sng">
+                      <a:noFill/>
+                      <a:prstDash val="solid"/>
+                    </a:lnTlToBr>
+                    <a:lnBlToTr w="12700" cmpd="sng">
+                      <a:noFill/>
+                      <a:prstDash val="solid"/>
+                    </a:lnBlToTr>
+                  </a:tcPr>
+                </a:tc>
+                <a:tc>
+                  <a:txBody>
+                    <a:bodyPr/>
+                    <a:lstStyle/>
+                    <a:p>
+                      <a:r>
+                        <a:rPr lang="en-GB" sz="3200" dirty="0"/>
+                        <a:t>Top half</a:t>
+                      </a:r>
+                    </a:p>
+                  </a:txBody>
+                  <a:tcPr>
+                    <a:lnL w="12700" cap="flat" cmpd="sng" algn="ctr">
+                      <a:solidFill>
+                        <a:schemeClr val="tx1"/>
+                      </a:solidFill>
+                      <a:prstDash val="solid"/>
+                      <a:round/>
+                      <a:headEnd type="none" w="med" len="med"/>
+                      <a:tailEnd type="none" w="med" len="med"/>
+                    </a:lnL>
+                    <a:lnR w="12700" cap="flat" cmpd="sng" algn="ctr">
+                      <a:solidFill>
+                        <a:schemeClr val="tx1"/>
+                      </a:solidFill>
+                      <a:prstDash val="solid"/>
+                      <a:round/>
+                      <a:headEnd type="none" w="med" len="med"/>
+                      <a:tailEnd type="none" w="med" len="med"/>
+                    </a:lnR>
+                    <a:lnT w="12700" cap="flat" cmpd="sng" algn="ctr">
+                      <a:solidFill>
+                        <a:schemeClr val="tx1"/>
+                      </a:solidFill>
+                      <a:prstDash val="solid"/>
+                      <a:round/>
+                      <a:headEnd type="none" w="med" len="med"/>
+                      <a:tailEnd type="none" w="med" len="med"/>
+                    </a:lnT>
+                    <a:lnB w="12700" cap="flat" cmpd="sng" algn="ctr">
+                      <a:solidFill>
+                        <a:schemeClr val="tx1"/>
+                      </a:solidFill>
+                      <a:prstDash val="solid"/>
+                      <a:round/>
+                      <a:headEnd type="none" w="med" len="med"/>
+                      <a:tailEnd type="none" w="med" len="med"/>
+                    </a:lnB>
+                    <a:lnTlToBr w="12700" cmpd="sng">
+                      <a:noFill/>
+                      <a:prstDash val="solid"/>
+                    </a:lnTlToBr>
+                    <a:lnBlToTr w="12700" cmpd="sng">
+                      <a:noFill/>
+                      <a:prstDash val="solid"/>
+                    </a:lnBlToTr>
+                  </a:tcPr>
+                </a:tc>
+                <a:extLst>
+                  <a:ext uri="{0D108BD9-81ED-4DB2-BD59-A6C34878D82A}">
+                    <a16:rowId xmlns:a16="http://schemas.microsoft.com/office/drawing/2014/main" val="1915007551"/>
+                  </a:ext>
+                </a:extLst>
+              </a:tr>
+              <a:tr h="370840">
+                <a:tc>
+                  <a:txBody>
+                    <a:bodyPr/>
+                    <a:lstStyle/>
+                    <a:p>
+                      <a:r>
+                        <a:rPr lang="en-GB" sz="3200" dirty="0"/>
+                        <a:t>Fitness</a:t>
+                      </a:r>
+                    </a:p>
+                  </a:txBody>
+                  <a:tcPr>
+                    <a:lnL w="12700" cap="flat" cmpd="sng" algn="ctr">
+                      <a:solidFill>
+                        <a:schemeClr val="tx1"/>
+                      </a:solidFill>
+                      <a:prstDash val="solid"/>
+                      <a:round/>
+                      <a:headEnd type="none" w="med" len="med"/>
+                      <a:tailEnd type="none" w="med" len="med"/>
+                    </a:lnL>
+                    <a:lnR w="12700" cap="flat" cmpd="sng" algn="ctr">
+                      <a:solidFill>
+                        <a:schemeClr val="tx1"/>
+                      </a:solidFill>
+                      <a:prstDash val="solid"/>
+                      <a:round/>
+                      <a:headEnd type="none" w="med" len="med"/>
+                      <a:tailEnd type="none" w="med" len="med"/>
+                    </a:lnR>
+                    <a:lnT w="12700" cap="flat" cmpd="sng" algn="ctr">
+                      <a:solidFill>
+                        <a:schemeClr val="tx1"/>
+                      </a:solidFill>
+                      <a:prstDash val="solid"/>
+                      <a:round/>
+                      <a:headEnd type="none" w="med" len="med"/>
+                      <a:tailEnd type="none" w="med" len="med"/>
+                    </a:lnT>
+                    <a:lnB w="12700" cap="flat" cmpd="sng" algn="ctr">
+                      <a:solidFill>
+                        <a:schemeClr val="tx1"/>
+                      </a:solidFill>
+                      <a:prstDash val="solid"/>
+                      <a:round/>
+                      <a:headEnd type="none" w="med" len="med"/>
+                      <a:tailEnd type="none" w="med" len="med"/>
+                    </a:lnB>
+                    <a:lnTlToBr w="12700" cmpd="sng">
+                      <a:noFill/>
+                      <a:prstDash val="solid"/>
+                    </a:lnTlToBr>
+                    <a:lnBlToTr w="12700" cmpd="sng">
+                      <a:noFill/>
+                      <a:prstDash val="solid"/>
+                    </a:lnBlToTr>
+                  </a:tcPr>
+                </a:tc>
+                <a:tc>
+                  <a:txBody>
+                    <a:bodyPr/>
+                    <a:lstStyle/>
+                    <a:p>
+                      <a:r>
+                        <a:rPr lang="en-GB" sz="3200" dirty="0"/>
+                        <a:t>Lift over drag (L/D)</a:t>
+                      </a:r>
+                    </a:p>
+                  </a:txBody>
+                  <a:tcPr>
+                    <a:lnL w="12700" cap="flat" cmpd="sng" algn="ctr">
+                      <a:solidFill>
+                        <a:schemeClr val="tx1"/>
+                      </a:solidFill>
+                      <a:prstDash val="solid"/>
+                      <a:round/>
+                      <a:headEnd type="none" w="med" len="med"/>
+                      <a:tailEnd type="none" w="med" len="med"/>
+                    </a:lnL>
+                    <a:lnR w="12700" cap="flat" cmpd="sng" algn="ctr">
+                      <a:solidFill>
+                        <a:schemeClr val="tx1"/>
+                      </a:solidFill>
+                      <a:prstDash val="solid"/>
+                      <a:round/>
+                      <a:headEnd type="none" w="med" len="med"/>
+                      <a:tailEnd type="none" w="med" len="med"/>
+                    </a:lnR>
+                    <a:lnT w="12700" cap="flat" cmpd="sng" algn="ctr">
+                      <a:solidFill>
+                        <a:schemeClr val="tx1"/>
+                      </a:solidFill>
+                      <a:prstDash val="solid"/>
+                      <a:round/>
+                      <a:headEnd type="none" w="med" len="med"/>
+                      <a:tailEnd type="none" w="med" len="med"/>
+                    </a:lnT>
+                    <a:lnB w="12700" cap="flat" cmpd="sng" algn="ctr">
+                      <a:solidFill>
+                        <a:schemeClr val="tx1"/>
+                      </a:solidFill>
+                      <a:prstDash val="solid"/>
+                      <a:round/>
+                      <a:headEnd type="none" w="med" len="med"/>
+                      <a:tailEnd type="none" w="med" len="med"/>
+                    </a:lnB>
+                    <a:lnTlToBr w="12700" cmpd="sng">
+                      <a:noFill/>
+                      <a:prstDash val="solid"/>
+                    </a:lnTlToBr>
+                    <a:lnBlToTr w="12700" cmpd="sng">
+                      <a:noFill/>
+                      <a:prstDash val="solid"/>
+                    </a:lnBlToTr>
+                  </a:tcPr>
+                </a:tc>
+                <a:extLst>
+                  <a:ext uri="{0D108BD9-81ED-4DB2-BD59-A6C34878D82A}">
+                    <a16:rowId xmlns:a16="http://schemas.microsoft.com/office/drawing/2014/main" val="4243001415"/>
+                  </a:ext>
+                </a:extLst>
+              </a:tr>
+            </a:tbl>
+          </a:graphicData>
+        </a:graphic>
+      </p:graphicFrame>
+      <p:sp>
+        <p:nvSpPr>
+          <p:cNvPr id="11" name="Rectangle 10">
+            <a:extLst>
+              <a:ext uri="{FF2B5EF4-FFF2-40B4-BE49-F238E27FC236}">
+                <a16:creationId xmlns:a16="http://schemas.microsoft.com/office/drawing/2014/main" id="{A71C4372-4B81-76B8-9A6F-A98E6A071637}"/>
+              </a:ext>
+            </a:extLst>
+          </p:cNvPr>
+          <p:cNvSpPr/>
+          <p:nvPr/>
+        </p:nvSpPr>
+        <p:spPr>
+          <a:xfrm>
+            <a:off x="-2897" y="3360604"/>
+            <a:ext cx="5665028" cy="5047200"/>
+          </a:xfrm>
+          <a:prstGeom prst="rect">
+            <a:avLst/>
+          </a:prstGeom>
+          <a:noFill/>
+          <a:ln w="76200">
+            <a:solidFill>
+              <a:schemeClr val="tx1"/>
+            </a:solidFill>
+          </a:ln>
+        </p:spPr>
+        <p:style>
+          <a:lnRef idx="2">
+            <a:schemeClr val="accent1">
+              <a:shade val="15000"/>
+            </a:schemeClr>
+          </a:lnRef>
+          <a:fillRef idx="1">
+            <a:schemeClr val="accent1"/>
+          </a:fillRef>
+          <a:effectRef idx="0">
+            <a:schemeClr val="accent1"/>
+          </a:effectRef>
+          <a:fontRef idx="minor">
+            <a:schemeClr val="lt1"/>
+          </a:fontRef>
+        </p:style>
+        <p:txBody>
+          <a:bodyPr rtlCol="0" anchor="t"/>
+          <a:lstStyle/>
+          <a:p>
+            <a:pPr algn="ctr"/>
+            <a:r>
+              <a:rPr lang="en-GB" sz="4800" b="1" u="sng" dirty="0">
+                <a:solidFill>
+                  <a:schemeClr val="tx1"/>
+                </a:solidFill>
+              </a:rPr>
+              <a:t>Aim</a:t>
+            </a:r>
+            <a:endParaRPr lang="en-GB" sz="1600" b="1" dirty="0">
+              <a:solidFill>
+                <a:schemeClr val="tx1"/>
+              </a:solidFill>
+            </a:endParaRPr>
+          </a:p>
+          <a:p>
+            <a:pPr algn="ctr"/>
+            <a:r>
+              <a:rPr lang="en-GB" sz="3200" dirty="0">
+                <a:solidFill>
+                  <a:schemeClr val="tx1"/>
+                </a:solidFill>
+              </a:rPr>
+              <a:t>To explore the use of genetic algorithms to speed up airfoil design, and how they can help the most. I tested 3 different optimization methods, each altering different factors, and recorded the progress through generations.</a:t>
+            </a:r>
+            <a:endParaRPr lang="en-GB" sz="3200" dirty="0">
+              <a:solidFill>
+                <a:srgbClr val="000066"/>
+              </a:solidFill>
+            </a:endParaRPr>
+          </a:p>
+        </p:txBody>
+      </p:sp>
     </p:spTree>
     <p:extLst>
       <p:ext uri="{BB962C8B-B14F-4D97-AF65-F5344CB8AC3E}">
